--- a/decks/output/02-smartgate-spotlight-v0.pptx
+++ b/decks/output/02-smartgate-spotlight-v0.pptx
@@ -20,11 +20,6 @@
     <p:sldId id="268" r:id="rId19"/>
     <p:sldId id="269" r:id="rId20"/>
     <p:sldId id="270" r:id="rId21"/>
-    <p:sldId id="271" r:id="rId22"/>
-    <p:sldId id="272" r:id="rId23"/>
-    <p:sldId id="273" r:id="rId24"/>
-    <p:sldId id="274" r:id="rId25"/>
-    <p:sldId id="275" r:id="rId26"/>
   </p:sldIdLst>
   <p:sldSz cx="12192000" cy="6858000" type="screen4x3"/>
   <p:notesSz cx="6858000" cy="9144000"/>
@@ -3372,8 +3367,8 @@
         </p:nvSpPr>
         <p:spPr>
           <a:xfrm>
-            <a:off x="800000" y="500000"/>
-            <a:ext cx="10500000" cy="700000"/>
+            <a:off x="1200000" y="2200000"/>
+            <a:ext cx="9700000" cy="1500000"/>
           </a:xfrm>
           <a:prstGeom prst="rect">
             <a:avLst/>
@@ -3386,6 +3381,161 @@
           </a:bodyPr>
           <a:lstStyle/>
           <a:p>
+            <a:pPr algn="ctr"/>
+            <a:r>
+              <a:rPr sz="4400" b="1">
+                <a:solidFill>
+                  <a:srgbClr val="0E1411"/>
+                </a:solidFill>
+                <a:latin typeface="Playfair Display"/>
+              </a:rPr>
+              <a:t>Reports leadership opens.</a:t>
+            </a:r>
+          </a:p>
+        </p:txBody>
+      </p:sp>
+      <p:pic>
+        <p:nvPicPr>
+          <p:cNvPr id="3" name="Picture 2" descr="gold-deco-hairline.png"/>
+          <p:cNvPicPr>
+            <a:picLocks noChangeAspect="1"/>
+          </p:cNvPicPr>
+          <p:nvPr/>
+        </p:nvPicPr>
+        <p:blipFill>
+          <a:blip r:embed="rId2"/>
+          <a:stretch>
+            <a:fillRect/>
+          </a:stretch>
+        </p:blipFill>
+        <p:spPr>
+          <a:xfrm>
+            <a:off x="5896000" y="3800000"/>
+            <a:ext cx="400000" cy="20000"/>
+          </a:xfrm>
+          <a:prstGeom prst="rect">
+            <a:avLst/>
+          </a:prstGeom>
+        </p:spPr>
+      </p:pic>
+      <p:sp>
+        <p:nvSpPr>
+          <p:cNvPr id="4" name="TextBox 3"/>
+          <p:cNvSpPr txBox="1"/>
+          <p:nvPr/>
+        </p:nvSpPr>
+        <p:spPr>
+          <a:xfrm>
+            <a:off x="1500000" y="4100000"/>
+            <a:ext cx="9100000" cy="1200000"/>
+          </a:xfrm>
+          <a:prstGeom prst="rect">
+            <a:avLst/>
+          </a:prstGeom>
+          <a:noFill/>
+        </p:spPr>
+        <p:txBody>
+          <a:bodyPr wrap="square">
+            <a:spAutoFit/>
+          </a:bodyPr>
+          <a:lstStyle/>
+          <a:p>
+            <a:pPr algn="ctr"/>
+            <a:r>
+              <a:rPr sz="2200" b="0">
+                <a:solidFill>
+                  <a:srgbClr val="1A1714"/>
+                </a:solidFill>
+                <a:latin typeface="DM Sans"/>
+              </a:rPr>
+              <a:t>Per-directorate, per-category, date-range. PDF export — no special access required.</a:t>
+            </a:r>
+          </a:p>
+        </p:txBody>
+      </p:sp>
+      <p:sp>
+        <p:nvSpPr>
+          <p:cNvPr id="5" name="TextBox 4"/>
+          <p:cNvSpPr txBox="1"/>
+          <p:nvPr/>
+        </p:nvSpPr>
+        <p:spPr>
+          <a:xfrm>
+            <a:off x="8000000" y="6500000"/>
+            <a:ext cx="4000000" cy="300000"/>
+          </a:xfrm>
+          <a:prstGeom prst="rect">
+            <a:avLst/>
+          </a:prstGeom>
+          <a:noFill/>
+        </p:spPr>
+        <p:txBody>
+          <a:bodyPr wrap="square">
+            <a:spAutoFit/>
+          </a:bodyPr>
+          <a:lstStyle/>
+          <a:p>
+            <a:pPr algn="r"/>
+            <a:r>
+              <a:rPr sz="1100" b="0">
+                <a:solidFill>
+                  <a:srgbClr val="D8CFBE"/>
+                </a:solidFill>
+                <a:latin typeface="DM Sans"/>
+              </a:rPr>
+              <a:t>02 · SmartGate — Visitor Management · 10/15</a:t>
+            </a:r>
+          </a:p>
+        </p:txBody>
+      </p:sp>
+    </p:spTree>
+  </p:cSld>
+  <p:clrMapOvr>
+    <a:masterClrMapping/>
+  </p:clrMapOvr>
+</p:sld>
+</file>
+
+<file path=ppt/slides/slide11.xml><?xml version="1.0" encoding="utf-8"?>
+<p:sld xmlns:a="http://schemas.openxmlformats.org/drawingml/2006/main" xmlns:p="http://schemas.openxmlformats.org/presentationml/2006/main" xmlns:r="http://schemas.openxmlformats.org/officeDocument/2006/relationships">
+  <p:cSld>
+    <p:bg>
+      <p:bgPr>
+        <a:solidFill>
+          <a:srgbClr val="F6F1E7"/>
+        </a:solidFill>
+        <a:effectLst/>
+      </p:bgPr>
+    </p:bg>
+    <p:spTree>
+      <p:nvGrpSpPr>
+        <p:cNvPr id="1" name=""/>
+        <p:cNvGrpSpPr/>
+        <p:nvPr/>
+      </p:nvGrpSpPr>
+      <p:grpSpPr/>
+      <p:sp>
+        <p:nvSpPr>
+          <p:cNvPr id="2" name="TextBox 1"/>
+          <p:cNvSpPr txBox="1"/>
+          <p:nvPr/>
+        </p:nvSpPr>
+        <p:spPr>
+          <a:xfrm>
+            <a:off x="800000" y="500000"/>
+            <a:ext cx="10500000" cy="700000"/>
+          </a:xfrm>
+          <a:prstGeom prst="rect">
+            <a:avLst/>
+          </a:prstGeom>
+          <a:noFill/>
+        </p:spPr>
+        <p:txBody>
+          <a:bodyPr wrap="square">
+            <a:spAutoFit/>
+          </a:bodyPr>
+          <a:lstStyle/>
+          <a:p>
             <a:pPr algn="l"/>
             <a:r>
               <a:rPr sz="3200" b="1">
@@ -3394,7 +3544,7 @@
                 </a:solidFill>
                 <a:latin typeface="DM Sans"/>
               </a:rPr>
-              <a:t>Telegram alert, the host's phone</a:t>
+              <a:t>Visit reports</a:t>
             </a:r>
           </a:p>
         </p:txBody>
@@ -3448,7 +3598,7 @@
                 </a:solidFill>
                 <a:latin typeface="DM Sans"/>
               </a:rPr>
-              <a:t>[REPLACE: S05-telegram-arrival.png]</a:t>
+              <a:t>[REPLACE: S06-visit-report.png]</a:t>
             </a:r>
           </a:p>
         </p:txBody>
@@ -3483,7 +3633,7 @@
                 </a:solidFill>
                 <a:latin typeface="DM Sans"/>
               </a:rPr>
-              <a:t>①  Visitor name, purpose, badge code.</a:t>
+              <a:t>①  Filter by directorate, by date, by category.</a:t>
             </a:r>
           </a:p>
         </p:txBody>
@@ -3518,7 +3668,7 @@
                 </a:solidFill>
                 <a:latin typeface="DM Sans"/>
               </a:rPr>
-              <a:t>②  Tap to acknowledge.</a:t>
+              <a:t>②  Director-level scoping built in.</a:t>
             </a:r>
           </a:p>
         </p:txBody>
@@ -3553,7 +3703,7 @@
                 </a:solidFill>
                 <a:latin typeface="DM Sans"/>
               </a:rPr>
-              <a:t>③  Directorate director cc'd automatically.</a:t>
+              <a:t>③  One-click PDF export — server-side rendering.</a:t>
             </a:r>
           </a:p>
         </p:txBody>
@@ -3588,7 +3738,7 @@
                 </a:solidFill>
                 <a:latin typeface="DM Sans"/>
               </a:rPr>
-              <a:t>Telegram bot message, captured live.</a:t>
+              <a:t>/admin/reports — director view.</a:t>
             </a:r>
           </a:p>
         </p:txBody>
@@ -3623,162 +3773,7 @@
                 </a:solidFill>
                 <a:latin typeface="DM Sans"/>
               </a:rPr>
-              <a:t>02 · SmartGate — Visitor Management · 10/20</a:t>
-            </a:r>
-          </a:p>
-        </p:txBody>
-      </p:sp>
-    </p:spTree>
-  </p:cSld>
-  <p:clrMapOvr>
-    <a:masterClrMapping/>
-  </p:clrMapOvr>
-</p:sld>
-</file>
-
-<file path=ppt/slides/slide11.xml><?xml version="1.0" encoding="utf-8"?>
-<p:sld xmlns:a="http://schemas.openxmlformats.org/drawingml/2006/main" xmlns:p="http://schemas.openxmlformats.org/presentationml/2006/main" xmlns:r="http://schemas.openxmlformats.org/officeDocument/2006/relationships">
-  <p:cSld>
-    <p:bg>
-      <p:bgPr>
-        <a:solidFill>
-          <a:srgbClr val="0E1411"/>
-        </a:solidFill>
-        <a:effectLst/>
-      </p:bgPr>
-    </p:bg>
-    <p:spTree>
-      <p:nvGrpSpPr>
-        <p:cNvPr id="1" name=""/>
-        <p:cNvGrpSpPr/>
-        <p:nvPr/>
-      </p:nvGrpSpPr>
-      <p:grpSpPr/>
-      <p:pic>
-        <p:nvPicPr>
-          <p:cNvPr id="2" name="Picture 1" descr="kente-texture-overlay.png"/>
-          <p:cNvPicPr>
-            <a:picLocks noChangeAspect="1"/>
-          </p:cNvPicPr>
-          <p:nvPr/>
-        </p:nvPicPr>
-        <p:blipFill>
-          <a:blip r:embed="rId2"/>
-          <a:stretch>
-            <a:fillRect/>
-          </a:stretch>
-        </p:blipFill>
-        <p:spPr>
-          <a:xfrm>
-            <a:off x="0" y="0"/>
-            <a:ext cx="12192000" cy="6858000"/>
-          </a:xfrm>
-          <a:prstGeom prst="rect">
-            <a:avLst/>
-          </a:prstGeom>
-        </p:spPr>
-      </p:pic>
-      <p:sp>
-        <p:nvSpPr>
-          <p:cNvPr id="3" name="TextBox 2"/>
-          <p:cNvSpPr txBox="1"/>
-          <p:nvPr/>
-        </p:nvSpPr>
-        <p:spPr>
-          <a:xfrm>
-            <a:off x="800000" y="1500000"/>
-            <a:ext cx="10500000" cy="3500000"/>
-          </a:xfrm>
-          <a:prstGeom prst="rect">
-            <a:avLst/>
-          </a:prstGeom>
-          <a:noFill/>
-        </p:spPr>
-        <p:txBody>
-          <a:bodyPr wrap="square">
-            <a:spAutoFit/>
-          </a:bodyPr>
-          <a:lstStyle/>
-          <a:p>
-            <a:pPr algn="ctr"/>
-            <a:r>
-              <a:rPr sz="22000" b="1">
-                <a:solidFill>
-                  <a:srgbClr val="C9A14A"/>
-                </a:solidFill>
-                <a:latin typeface="Playfair Display"/>
-              </a:rPr>
-              <a:t>&lt;N02&gt;</a:t>
-            </a:r>
-          </a:p>
-        </p:txBody>
-      </p:sp>
-      <p:sp>
-        <p:nvSpPr>
-          <p:cNvPr id="4" name="TextBox 3"/>
-          <p:cNvSpPr txBox="1"/>
-          <p:nvPr/>
-        </p:nvSpPr>
-        <p:spPr>
-          <a:xfrm>
-            <a:off x="800000" y="5300000"/>
-            <a:ext cx="10500000" cy="700000"/>
-          </a:xfrm>
-          <a:prstGeom prst="rect">
-            <a:avLst/>
-          </a:prstGeom>
-          <a:noFill/>
-        </p:spPr>
-        <p:txBody>
-          <a:bodyPr wrap="square">
-            <a:spAutoFit/>
-          </a:bodyPr>
-          <a:lstStyle/>
-          <a:p>
-            <a:pPr algn="ctr"/>
-            <a:r>
-              <a:rPr sz="2800" b="0">
-                <a:solidFill>
-                  <a:srgbClr val="F6F1E7"/>
-                </a:solidFill>
-                <a:latin typeface="DM Sans"/>
-              </a:rPr>
-              <a:t>Visitors checked in on an average day. Each one accounted for.</a:t>
-            </a:r>
-          </a:p>
-        </p:txBody>
-      </p:sp>
-      <p:sp>
-        <p:nvSpPr>
-          <p:cNvPr id="5" name="TextBox 4"/>
-          <p:cNvSpPr txBox="1"/>
-          <p:nvPr/>
-        </p:nvSpPr>
-        <p:spPr>
-          <a:xfrm>
-            <a:off x="8000000" y="6500000"/>
-            <a:ext cx="4000000" cy="300000"/>
-          </a:xfrm>
-          <a:prstGeom prst="rect">
-            <a:avLst/>
-          </a:prstGeom>
-          <a:noFill/>
-        </p:spPr>
-        <p:txBody>
-          <a:bodyPr wrap="square">
-            <a:spAutoFit/>
-          </a:bodyPr>
-          <a:lstStyle/>
-          <a:p>
-            <a:pPr algn="r"/>
-            <a:r>
-              <a:rPr sz="1100" b="0">
-                <a:solidFill>
-                  <a:srgbClr val="D8CFBE"/>
-                </a:solidFill>
-                <a:latin typeface="DM Sans"/>
-              </a:rPr>
-              <a:t>02 · SmartGate — Visitor Management · 11/20</a:t>
+              <a:t>02 · SmartGate — Visitor Management · 11/15</a:t>
             </a:r>
           </a:p>
         </p:txBody>
@@ -3839,7 +3834,7 @@
                 </a:solidFill>
                 <a:latin typeface="Playfair Display"/>
               </a:rPr>
-              <a:t>Reports leadership opens.</a:t>
+              <a:t>When connectivity drops, reception doesn't stop.</a:t>
             </a:r>
           </a:p>
         </p:txBody>
@@ -3898,7 +3893,7 @@
                 </a:solidFill>
                 <a:latin typeface="DM Sans"/>
               </a:rPr>
-              <a:t>Per-directorate, per-category, date-range. PDF export — no special access required.</a:t>
+              <a:t>Queued check-ins replay on reconnect. Idempotent. Lossless.</a:t>
             </a:r>
           </a:p>
         </p:txBody>
@@ -3933,7 +3928,7 @@
                 </a:solidFill>
                 <a:latin typeface="DM Sans"/>
               </a:rPr>
-              <a:t>02 · SmartGate — Visitor Management · 12/20</a:t>
+              <a:t>02 · SmartGate — Visitor Management · 12/15</a:t>
             </a:r>
           </a:p>
         </p:txBody>
@@ -3972,8 +3967,8 @@
         </p:nvSpPr>
         <p:spPr>
           <a:xfrm>
-            <a:off x="800000" y="500000"/>
-            <a:ext cx="10500000" cy="700000"/>
+            <a:off x="1200000" y="2200000"/>
+            <a:ext cx="9700000" cy="1500000"/>
           </a:xfrm>
           <a:prstGeom prst="rect">
             <a:avLst/>
@@ -3986,73 +3981,43 @@
           </a:bodyPr>
           <a:lstStyle/>
           <a:p>
-            <a:pPr algn="l"/>
-            <a:r>
-              <a:rPr sz="3200" b="1">
+            <a:pPr algn="ctr"/>
+            <a:r>
+              <a:rPr sz="4400" b="1">
                 <a:solidFill>
                   <a:srgbClr val="0E1411"/>
                 </a:solidFill>
-                <a:latin typeface="DM Sans"/>
-              </a:rPr>
-              <a:t>Visit reports</a:t>
-            </a:r>
-          </a:p>
-        </p:txBody>
-      </p:sp>
-      <p:sp>
-        <p:nvSpPr>
-          <p:cNvPr id="3" name="Rectangle 2"/>
-          <p:cNvSpPr/>
-          <p:nvPr/>
-        </p:nvSpPr>
-        <p:spPr>
-          <a:xfrm>
-            <a:off x="800000" y="1500000"/>
-            <a:ext cx="5800000" cy="4500000"/>
-          </a:xfrm>
-          <a:prstGeom prst="rect">
-            <a:avLst/>
-          </a:prstGeom>
-          <a:solidFill>
-            <a:srgbClr val="FBF7EF"/>
-          </a:solidFill>
-          <a:ln>
-            <a:solidFill>
-              <a:srgbClr val="D8CFBE"/>
-            </a:solidFill>
-          </a:ln>
-        </p:spPr>
-        <p:style>
-          <a:lnRef idx="1">
-            <a:schemeClr val="accent1"/>
-          </a:lnRef>
-          <a:fillRef idx="3">
-            <a:schemeClr val="accent1"/>
-          </a:fillRef>
-          <a:effectRef idx="2">
-            <a:schemeClr val="accent1"/>
-          </a:effectRef>
-          <a:fontRef idx="minor">
-            <a:schemeClr val="lt1"/>
-          </a:fontRef>
-        </p:style>
-        <p:txBody>
-          <a:bodyPr rtlCol="0" anchor="ctr"/>
-          <a:lstStyle/>
-          <a:p>
-            <a:pPr algn="ctr"/>
-            <a:r>
-              <a:rPr sz="1100">
-                <a:solidFill>
-                  <a:srgbClr val="8B6B22"/>
-                </a:solidFill>
-                <a:latin typeface="DM Sans"/>
-              </a:rPr>
-              <a:t>[REPLACE: S06-visit-report.png]</a:t>
-            </a:r>
-          </a:p>
-        </p:txBody>
-      </p:sp>
+                <a:latin typeface="Playfair Display"/>
+              </a:rPr>
+              <a:t>One feature deserves a quote.</a:t>
+            </a:r>
+          </a:p>
+        </p:txBody>
+      </p:sp>
+      <p:pic>
+        <p:nvPicPr>
+          <p:cNvPr id="3" name="Picture 2" descr="gold-deco-hairline.png"/>
+          <p:cNvPicPr>
+            <a:picLocks noChangeAspect="1"/>
+          </p:cNvPicPr>
+          <p:nvPr/>
+        </p:nvPicPr>
+        <p:blipFill>
+          <a:blip r:embed="rId2"/>
+          <a:stretch>
+            <a:fillRect/>
+          </a:stretch>
+        </p:blipFill>
+        <p:spPr>
+          <a:xfrm>
+            <a:off x="5896000" y="3800000"/>
+            <a:ext cx="400000" cy="20000"/>
+          </a:xfrm>
+          <a:prstGeom prst="rect">
+            <a:avLst/>
+          </a:prstGeom>
+        </p:spPr>
+      </p:pic>
       <p:sp>
         <p:nvSpPr>
           <p:cNvPr id="4" name="TextBox 3"/>
@@ -4061,8 +4026,8 @@
         </p:nvSpPr>
         <p:spPr>
           <a:xfrm>
-            <a:off x="7100000" y="1500000"/>
-            <a:ext cx="4200000" cy="1100000"/>
+            <a:off x="1500000" y="4100000"/>
+            <a:ext cx="9100000" cy="1200000"/>
           </a:xfrm>
           <a:prstGeom prst="rect">
             <a:avLst/>
@@ -4075,15 +4040,15 @@
           </a:bodyPr>
           <a:lstStyle/>
           <a:p>
-            <a:pPr algn="l"/>
-            <a:r>
-              <a:rPr sz="1600" b="0">
+            <a:pPr algn="ctr"/>
+            <a:r>
+              <a:rPr sz="2200" b="0">
                 <a:solidFill>
                   <a:srgbClr val="1A1714"/>
                 </a:solidFill>
                 <a:latin typeface="DM Sans"/>
               </a:rPr>
-              <a:t>①  Filter by directorate, by date, by category.</a:t>
+              <a:t>"&lt;Q03&gt;"</a:t>
             </a:r>
           </a:p>
         </p:txBody>
@@ -4096,8 +4061,8 @@
         </p:nvSpPr>
         <p:spPr>
           <a:xfrm>
-            <a:off x="7100000" y="2800000"/>
-            <a:ext cx="4200000" cy="1100000"/>
+            <a:off x="8000000" y="6500000"/>
+            <a:ext cx="4000000" cy="300000"/>
           </a:xfrm>
           <a:prstGeom prst="rect">
             <a:avLst/>
@@ -4110,120 +4075,15 @@
           </a:bodyPr>
           <a:lstStyle/>
           <a:p>
-            <a:pPr algn="l"/>
-            <a:r>
-              <a:rPr sz="1600" b="0">
-                <a:solidFill>
-                  <a:srgbClr val="1A1714"/>
+            <a:pPr algn="r"/>
+            <a:r>
+              <a:rPr sz="1100" b="0">
+                <a:solidFill>
+                  <a:srgbClr val="D8CFBE"/>
                 </a:solidFill>
                 <a:latin typeface="DM Sans"/>
               </a:rPr>
-              <a:t>②  Sortable, sortable, sortable.</a:t>
-            </a:r>
-          </a:p>
-        </p:txBody>
-      </p:sp>
-      <p:sp>
-        <p:nvSpPr>
-          <p:cNvPr id="6" name="TextBox 5"/>
-          <p:cNvSpPr txBox="1"/>
-          <p:nvPr/>
-        </p:nvSpPr>
-        <p:spPr>
-          <a:xfrm>
-            <a:off x="7100000" y="4100000"/>
-            <a:ext cx="4200000" cy="1100000"/>
-          </a:xfrm>
-          <a:prstGeom prst="rect">
-            <a:avLst/>
-          </a:prstGeom>
-          <a:noFill/>
-        </p:spPr>
-        <p:txBody>
-          <a:bodyPr wrap="square">
-            <a:spAutoFit/>
-          </a:bodyPr>
-          <a:lstStyle/>
-          <a:p>
-            <a:pPr algn="l"/>
-            <a:r>
-              <a:rPr sz="1600" b="0">
-                <a:solidFill>
-                  <a:srgbClr val="1A1714"/>
-                </a:solidFill>
-                <a:latin typeface="DM Sans"/>
-              </a:rPr>
-              <a:t>③  Director-level scoping built in.</a:t>
-            </a:r>
-          </a:p>
-        </p:txBody>
-      </p:sp>
-      <p:sp>
-        <p:nvSpPr>
-          <p:cNvPr id="7" name="TextBox 6"/>
-          <p:cNvSpPr txBox="1"/>
-          <p:nvPr/>
-        </p:nvSpPr>
-        <p:spPr>
-          <a:xfrm>
-            <a:off x="800000" y="6100000"/>
-            <a:ext cx="10500000" cy="300000"/>
-          </a:xfrm>
-          <a:prstGeom prst="rect">
-            <a:avLst/>
-          </a:prstGeom>
-          <a:noFill/>
-        </p:spPr>
-        <p:txBody>
-          <a:bodyPr wrap="square">
-            <a:spAutoFit/>
-          </a:bodyPr>
-          <a:lstStyle/>
-          <a:p>
-            <a:pPr algn="l"/>
-            <a:r>
-              <a:rPr sz="1100" b="0">
-                <a:solidFill>
-                  <a:srgbClr val="8B6B22"/>
-                </a:solidFill>
-                <a:latin typeface="DM Sans"/>
-              </a:rPr>
-              <a:t>/admin/reports — director view.</a:t>
-            </a:r>
-          </a:p>
-        </p:txBody>
-      </p:sp>
-      <p:sp>
-        <p:nvSpPr>
-          <p:cNvPr id="8" name="TextBox 7"/>
-          <p:cNvSpPr txBox="1"/>
-          <p:nvPr/>
-        </p:nvSpPr>
-        <p:spPr>
-          <a:xfrm>
-            <a:off x="8000000" y="6500000"/>
-            <a:ext cx="4000000" cy="300000"/>
-          </a:xfrm>
-          <a:prstGeom prst="rect">
-            <a:avLst/>
-          </a:prstGeom>
-          <a:noFill/>
-        </p:spPr>
-        <p:txBody>
-          <a:bodyPr wrap="square">
-            <a:spAutoFit/>
-          </a:bodyPr>
-          <a:lstStyle/>
-          <a:p>
-            <a:pPr algn="r"/>
-            <a:r>
-              <a:rPr sz="1100" b="0">
-                <a:solidFill>
-                  <a:srgbClr val="D8CFBE"/>
-                </a:solidFill>
-                <a:latin typeface="DM Sans"/>
-              </a:rPr>
-              <a:t>02 · SmartGate — Visitor Management · 13/20</a:t>
+              <a:t>02 · SmartGate — Visitor Management · 13/15</a:t>
             </a:r>
           </a:p>
         </p:txBody>
@@ -4242,7 +4102,7 @@
     <p:bg>
       <p:bgPr>
         <a:solidFill>
-          <a:srgbClr val="F6F1E7"/>
+          <a:srgbClr val="0E1411"/>
         </a:solidFill>
         <a:effectLst/>
       </p:bgPr>
@@ -4254,16 +4114,40 @@
         <p:nvPr/>
       </p:nvGrpSpPr>
       <p:grpSpPr/>
-      <p:sp>
-        <p:nvSpPr>
-          <p:cNvPr id="2" name="TextBox 1"/>
+      <p:pic>
+        <p:nvPicPr>
+          <p:cNvPr id="2" name="Picture 1" descr="kente-texture-overlay.png"/>
+          <p:cNvPicPr>
+            <a:picLocks noChangeAspect="1"/>
+          </p:cNvPicPr>
+          <p:nvPr/>
+        </p:nvPicPr>
+        <p:blipFill>
+          <a:blip r:embed="rId2"/>
+          <a:stretch>
+            <a:fillRect/>
+          </a:stretch>
+        </p:blipFill>
+        <p:spPr>
+          <a:xfrm>
+            <a:off x="0" y="0"/>
+            <a:ext cx="12192000" cy="6858000"/>
+          </a:xfrm>
+          <a:prstGeom prst="rect">
+            <a:avLst/>
+          </a:prstGeom>
+        </p:spPr>
+      </p:pic>
+      <p:sp>
+        <p:nvSpPr>
+          <p:cNvPr id="3" name="TextBox 2"/>
           <p:cNvSpPr txBox="1"/>
           <p:nvPr/>
         </p:nvSpPr>
         <p:spPr>
           <a:xfrm>
-            <a:off x="800000" y="500000"/>
-            <a:ext cx="10500000" cy="700000"/>
+            <a:off x="1600000" y="2800000"/>
+            <a:ext cx="8900000" cy="2000000"/>
           </a:xfrm>
           <a:prstGeom prst="rect">
             <a:avLst/>
@@ -4276,244 +4160,15 @@
           </a:bodyPr>
           <a:lstStyle/>
           <a:p>
-            <a:pPr algn="l"/>
-            <a:r>
-              <a:rPr sz="3200" b="1">
-                <a:solidFill>
-                  <a:srgbClr val="0E1411"/>
-                </a:solidFill>
-                <a:latin typeface="DM Sans"/>
-              </a:rPr>
-              <a:t>PDF export</a:t>
-            </a:r>
-          </a:p>
-        </p:txBody>
-      </p:sp>
-      <p:sp>
-        <p:nvSpPr>
-          <p:cNvPr id="3" name="Rectangle 2"/>
-          <p:cNvSpPr/>
-          <p:nvPr/>
-        </p:nvSpPr>
-        <p:spPr>
-          <a:xfrm>
-            <a:off x="800000" y="1500000"/>
-            <a:ext cx="5800000" cy="4500000"/>
-          </a:xfrm>
-          <a:prstGeom prst="rect">
-            <a:avLst/>
-          </a:prstGeom>
-          <a:solidFill>
-            <a:srgbClr val="FBF7EF"/>
-          </a:solidFill>
-          <a:ln>
-            <a:solidFill>
-              <a:srgbClr val="D8CFBE"/>
-            </a:solidFill>
-          </a:ln>
-        </p:spPr>
-        <p:style>
-          <a:lnRef idx="1">
-            <a:schemeClr val="accent1"/>
-          </a:lnRef>
-          <a:fillRef idx="3">
-            <a:schemeClr val="accent1"/>
-          </a:fillRef>
-          <a:effectRef idx="2">
-            <a:schemeClr val="accent1"/>
-          </a:effectRef>
-          <a:fontRef idx="minor">
-            <a:schemeClr val="lt1"/>
-          </a:fontRef>
-        </p:style>
-        <p:txBody>
-          <a:bodyPr rtlCol="0" anchor="ctr"/>
-          <a:lstStyle/>
-          <a:p>
             <a:pPr algn="ctr"/>
             <a:r>
-              <a:rPr sz="1100">
-                <a:solidFill>
-                  <a:srgbClr val="8B6B22"/>
-                </a:solidFill>
-                <a:latin typeface="DM Sans"/>
-              </a:rPr>
-              <a:t>[REPLACE: S07-pdf-export.png]</a:t>
-            </a:r>
-          </a:p>
-        </p:txBody>
-      </p:sp>
-      <p:sp>
-        <p:nvSpPr>
-          <p:cNvPr id="4" name="TextBox 3"/>
-          <p:cNvSpPr txBox="1"/>
-          <p:nvPr/>
-        </p:nvSpPr>
-        <p:spPr>
-          <a:xfrm>
-            <a:off x="7100000" y="1500000"/>
-            <a:ext cx="4200000" cy="1100000"/>
-          </a:xfrm>
-          <a:prstGeom prst="rect">
-            <a:avLst/>
-          </a:prstGeom>
-          <a:noFill/>
-        </p:spPr>
-        <p:txBody>
-          <a:bodyPr wrap="square">
-            <a:spAutoFit/>
-          </a:bodyPr>
-          <a:lstStyle/>
-          <a:p>
-            <a:pPr algn="l"/>
-            <a:r>
-              <a:rPr sz="1600" b="0">
-                <a:solidFill>
-                  <a:srgbClr val="1A1714"/>
-                </a:solidFill>
-                <a:latin typeface="DM Sans"/>
-              </a:rPr>
-              <a:t>①  One-click export.</a:t>
-            </a:r>
-          </a:p>
-        </p:txBody>
-      </p:sp>
-      <p:sp>
-        <p:nvSpPr>
-          <p:cNvPr id="5" name="TextBox 4"/>
-          <p:cNvSpPr txBox="1"/>
-          <p:nvPr/>
-        </p:nvSpPr>
-        <p:spPr>
-          <a:xfrm>
-            <a:off x="7100000" y="2800000"/>
-            <a:ext cx="4200000" cy="1100000"/>
-          </a:xfrm>
-          <a:prstGeom prst="rect">
-            <a:avLst/>
-          </a:prstGeom>
-          <a:noFill/>
-        </p:spPr>
-        <p:txBody>
-          <a:bodyPr wrap="square">
-            <a:spAutoFit/>
-          </a:bodyPr>
-          <a:lstStyle/>
-          <a:p>
-            <a:pPr algn="l"/>
-            <a:r>
-              <a:rPr sz="1600" b="0">
-                <a:solidFill>
-                  <a:srgbClr val="1A1714"/>
-                </a:solidFill>
-                <a:latin typeface="DM Sans"/>
-              </a:rPr>
-              <a:t>②  Server-side rendering — no client memory hog.</a:t>
-            </a:r>
-          </a:p>
-        </p:txBody>
-      </p:sp>
-      <p:sp>
-        <p:nvSpPr>
-          <p:cNvPr id="6" name="TextBox 5"/>
-          <p:cNvSpPr txBox="1"/>
-          <p:nvPr/>
-        </p:nvSpPr>
-        <p:spPr>
-          <a:xfrm>
-            <a:off x="7100000" y="4100000"/>
-            <a:ext cx="4200000" cy="1100000"/>
-          </a:xfrm>
-          <a:prstGeom prst="rect">
-            <a:avLst/>
-          </a:prstGeom>
-          <a:noFill/>
-        </p:spPr>
-        <p:txBody>
-          <a:bodyPr wrap="square">
-            <a:spAutoFit/>
-          </a:bodyPr>
-          <a:lstStyle/>
-          <a:p>
-            <a:pPr algn="l"/>
-            <a:r>
-              <a:rPr sz="1600" b="0">
-                <a:solidFill>
-                  <a:srgbClr val="1A1714"/>
-                </a:solidFill>
-                <a:latin typeface="DM Sans"/>
-              </a:rPr>
-              <a:t>③  Same layout as on-screen — what you see is what you share.</a:t>
-            </a:r>
-          </a:p>
-        </p:txBody>
-      </p:sp>
-      <p:sp>
-        <p:nvSpPr>
-          <p:cNvPr id="7" name="TextBox 6"/>
-          <p:cNvSpPr txBox="1"/>
-          <p:nvPr/>
-        </p:nvSpPr>
-        <p:spPr>
-          <a:xfrm>
-            <a:off x="800000" y="6100000"/>
-            <a:ext cx="10500000" cy="300000"/>
-          </a:xfrm>
-          <a:prstGeom prst="rect">
-            <a:avLst/>
-          </a:prstGeom>
-          <a:noFill/>
-        </p:spPr>
-        <p:txBody>
-          <a:bodyPr wrap="square">
-            <a:spAutoFit/>
-          </a:bodyPr>
-          <a:lstStyle/>
-          <a:p>
-            <a:pPr algn="l"/>
-            <a:r>
-              <a:rPr sz="1100" b="0">
-                <a:solidFill>
-                  <a:srgbClr val="8B6B22"/>
-                </a:solidFill>
-                <a:latin typeface="DM Sans"/>
-              </a:rPr>
-              <a:t>Exported PDF, first page.</a:t>
-            </a:r>
-          </a:p>
-        </p:txBody>
-      </p:sp>
-      <p:sp>
-        <p:nvSpPr>
-          <p:cNvPr id="8" name="TextBox 7"/>
-          <p:cNvSpPr txBox="1"/>
-          <p:nvPr/>
-        </p:nvSpPr>
-        <p:spPr>
-          <a:xfrm>
-            <a:off x="8000000" y="6500000"/>
-            <a:ext cx="4000000" cy="300000"/>
-          </a:xfrm>
-          <a:prstGeom prst="rect">
-            <a:avLst/>
-          </a:prstGeom>
-          <a:noFill/>
-        </p:spPr>
-        <p:txBody>
-          <a:bodyPr wrap="square">
-            <a:spAutoFit/>
-          </a:bodyPr>
-          <a:lstStyle/>
-          <a:p>
-            <a:pPr algn="r"/>
-            <a:r>
-              <a:rPr sz="1100" b="0">
-                <a:solidFill>
-                  <a:srgbClr val="D8CFBE"/>
-                </a:solidFill>
-                <a:latin typeface="DM Sans"/>
-              </a:rPr>
-              <a:t>02 · SmartGate — Visitor Management · 14/20</a:t>
+              <a:rPr sz="4400" b="0">
+                <a:solidFill>
+                  <a:srgbClr val="F6F1E7"/>
+                </a:solidFill>
+                <a:latin typeface="Playfair Display"/>
+              </a:rPr>
+              <a:t>SmartGate works because reception didn't have to learn it. They already knew it.</a:t>
             </a:r>
           </a:p>
         </p:txBody>
@@ -4552,8 +4207,8 @@
         </p:nvSpPr>
         <p:spPr>
           <a:xfrm>
-            <a:off x="1200000" y="2200000"/>
-            <a:ext cx="9700000" cy="1500000"/>
+            <a:off x="1000000" y="800000"/>
+            <a:ext cx="10000000" cy="700000"/>
           </a:xfrm>
           <a:prstGeom prst="rect">
             <a:avLst/>
@@ -4566,7 +4221,7 @@
           </a:bodyPr>
           <a:lstStyle/>
           <a:p>
-            <a:pPr algn="ctr"/>
+            <a:pPr algn="l"/>
             <a:r>
               <a:rPr sz="4400" b="1">
                 <a:solidFill>
@@ -4574,45 +4229,21 @@
                 </a:solidFill>
                 <a:latin typeface="Playfair Display"/>
               </a:rPr>
-              <a:t>When connectivity drops, reception doesn't stop.</a:t>
-            </a:r>
-          </a:p>
-        </p:txBody>
-      </p:sp>
-      <p:pic>
-        <p:nvPicPr>
-          <p:cNvPr id="3" name="Picture 2" descr="gold-deco-hairline.png"/>
-          <p:cNvPicPr>
-            <a:picLocks noChangeAspect="1"/>
-          </p:cNvPicPr>
-          <p:nvPr/>
-        </p:nvPicPr>
-        <p:blipFill>
-          <a:blip r:embed="rId2"/>
-          <a:stretch>
-            <a:fillRect/>
-          </a:stretch>
-        </p:blipFill>
-        <p:spPr>
-          <a:xfrm>
-            <a:off x="5896000" y="3800000"/>
-            <a:ext cx="400000" cy="20000"/>
-          </a:xfrm>
-          <a:prstGeom prst="rect">
-            <a:avLst/>
-          </a:prstGeom>
-        </p:spPr>
-      </p:pic>
-      <p:sp>
-        <p:nvSpPr>
-          <p:cNvPr id="4" name="TextBox 3"/>
+              <a:t>Appendix</a:t>
+            </a:r>
+          </a:p>
+        </p:txBody>
+      </p:sp>
+      <p:sp>
+        <p:nvSpPr>
+          <p:cNvPr id="3" name="TextBox 2"/>
           <p:cNvSpPr txBox="1"/>
           <p:nvPr/>
         </p:nvSpPr>
         <p:spPr>
           <a:xfrm>
-            <a:off x="1500000" y="4100000"/>
-            <a:ext cx="9100000" cy="1200000"/>
+            <a:off x="1000000" y="2000000"/>
+            <a:ext cx="5000000" cy="400000"/>
           </a:xfrm>
           <a:prstGeom prst="rect">
             <a:avLst/>
@@ -4625,29 +4256,29 @@
           </a:bodyPr>
           <a:lstStyle/>
           <a:p>
-            <a:pPr algn="ctr"/>
-            <a:r>
-              <a:rPr sz="2200" b="0">
-                <a:solidFill>
-                  <a:srgbClr val="1A1714"/>
+            <a:pPr algn="l"/>
+            <a:r>
+              <a:rPr sz="1800" b="1">
+                <a:solidFill>
+                  <a:srgbClr val="8B6B22"/>
                 </a:solidFill>
                 <a:latin typeface="DM Sans"/>
               </a:rPr>
-              <a:t>Queued check-ins replay on reconnect. Idempotent. Lossless.</a:t>
-            </a:r>
-          </a:p>
-        </p:txBody>
-      </p:sp>
-      <p:sp>
-        <p:nvSpPr>
-          <p:cNvPr id="5" name="TextBox 4"/>
+              <a:t>Live URLs</a:t>
+            </a:r>
+          </a:p>
+        </p:txBody>
+      </p:sp>
+      <p:sp>
+        <p:nvSpPr>
+          <p:cNvPr id="4" name="TextBox 3"/>
           <p:cNvSpPr txBox="1"/>
           <p:nvPr/>
         </p:nvSpPr>
         <p:spPr>
           <a:xfrm>
-            <a:off x="8000000" y="6500000"/>
-            <a:ext cx="4000000" cy="300000"/>
+            <a:off x="1000000" y="2500000"/>
+            <a:ext cx="5000000" cy="400000"/>
           </a:xfrm>
           <a:prstGeom prst="rect">
             <a:avLst/>
@@ -4660,55 +4291,29 @@
           </a:bodyPr>
           <a:lstStyle/>
           <a:p>
-            <a:pPr algn="r"/>
-            <a:r>
-              <a:rPr sz="1100" b="0">
-                <a:solidFill>
-                  <a:srgbClr val="D8CFBE"/>
+            <a:pPr algn="l"/>
+            <a:r>
+              <a:rPr sz="1400" b="0">
+                <a:solidFill>
+                  <a:srgbClr val="1A1714"/>
                 </a:solidFill>
                 <a:latin typeface="DM Sans"/>
               </a:rPr>
-              <a:t>02 · SmartGate — Visitor Management · 15/20</a:t>
-            </a:r>
-          </a:p>
-        </p:txBody>
-      </p:sp>
-    </p:spTree>
-  </p:cSld>
-  <p:clrMapOvr>
-    <a:masterClrMapping/>
-  </p:clrMapOvr>
-</p:sld>
-</file>
-
-<file path=ppt/slides/slide16.xml><?xml version="1.0" encoding="utf-8"?>
-<p:sld xmlns:a="http://schemas.openxmlformats.org/drawingml/2006/main" xmlns:p="http://schemas.openxmlformats.org/presentationml/2006/main" xmlns:r="http://schemas.openxmlformats.org/officeDocument/2006/relationships">
-  <p:cSld>
-    <p:bg>
-      <p:bgPr>
-        <a:solidFill>
-          <a:srgbClr val="F6F1E7"/>
-        </a:solidFill>
-        <a:effectLst/>
-      </p:bgPr>
-    </p:bg>
-    <p:spTree>
-      <p:nvGrpSpPr>
-        <p:cNvPr id="1" name=""/>
-        <p:cNvGrpSpPr/>
-        <p:nvPr/>
-      </p:nvGrpSpPr>
-      <p:grpSpPr/>
-      <p:sp>
-        <p:nvSpPr>
-          <p:cNvPr id="2" name="TextBox 1"/>
+              <a:t>ohcs-smartgate.pages.dev</a:t>
+            </a:r>
+          </a:p>
+        </p:txBody>
+      </p:sp>
+      <p:sp>
+        <p:nvSpPr>
+          <p:cNvPr id="5" name="TextBox 4"/>
           <p:cNvSpPr txBox="1"/>
           <p:nvPr/>
         </p:nvSpPr>
         <p:spPr>
           <a:xfrm>
-            <a:off x="800000" y="500000"/>
-            <a:ext cx="10500000" cy="700000"/>
+            <a:off x="1000000" y="2900000"/>
+            <a:ext cx="5000000" cy="400000"/>
           </a:xfrm>
           <a:prstGeom prst="rect">
             <a:avLst/>
@@ -4723,81 +4328,27 @@
           <a:p>
             <a:pPr algn="l"/>
             <a:r>
-              <a:rPr sz="3200" b="1">
-                <a:solidFill>
-                  <a:srgbClr val="0E1411"/>
+              <a:rPr sz="1400" b="0">
+                <a:solidFill>
+                  <a:srgbClr val="1A1714"/>
                 </a:solidFill>
                 <a:latin typeface="DM Sans"/>
               </a:rPr>
-              <a:t>Offline check-in queue</a:t>
-            </a:r>
-          </a:p>
-        </p:txBody>
-      </p:sp>
-      <p:sp>
-        <p:nvSpPr>
-          <p:cNvPr id="3" name="Rectangle 2"/>
-          <p:cNvSpPr/>
-          <p:nvPr/>
-        </p:nvSpPr>
-        <p:spPr>
-          <a:xfrm>
-            <a:off x="800000" y="1500000"/>
-            <a:ext cx="5800000" cy="4500000"/>
-          </a:xfrm>
-          <a:prstGeom prst="rect">
-            <a:avLst/>
-          </a:prstGeom>
-          <a:solidFill>
-            <a:srgbClr val="FBF7EF"/>
-          </a:solidFill>
-          <a:ln>
-            <a:solidFill>
-              <a:srgbClr val="D8CFBE"/>
-            </a:solidFill>
-          </a:ln>
-        </p:spPr>
-        <p:style>
-          <a:lnRef idx="1">
-            <a:schemeClr val="accent1"/>
-          </a:lnRef>
-          <a:fillRef idx="3">
-            <a:schemeClr val="accent1"/>
-          </a:fillRef>
-          <a:effectRef idx="2">
-            <a:schemeClr val="accent1"/>
-          </a:effectRef>
-          <a:fontRef idx="minor">
-            <a:schemeClr val="lt1"/>
-          </a:fontRef>
-        </p:style>
-        <p:txBody>
-          <a:bodyPr rtlCol="0" anchor="ctr"/>
-          <a:lstStyle/>
-          <a:p>
-            <a:pPr algn="ctr"/>
-            <a:r>
-              <a:rPr sz="1100">
-                <a:solidFill>
-                  <a:srgbClr val="8B6B22"/>
-                </a:solidFill>
-                <a:latin typeface="DM Sans"/>
-              </a:rPr>
-              <a:t>[REPLACE: S22-queue-replay.png]</a:t>
-            </a:r>
-          </a:p>
-        </p:txBody>
-      </p:sp>
-      <p:sp>
-        <p:nvSpPr>
-          <p:cNvPr id="4" name="TextBox 3"/>
+              <a:t>ohcs-smartgate-api.ghwmelite.workers.dev</a:t>
+            </a:r>
+          </a:p>
+        </p:txBody>
+      </p:sp>
+      <p:sp>
+        <p:nvSpPr>
+          <p:cNvPr id="6" name="TextBox 5"/>
           <p:cNvSpPr txBox="1"/>
           <p:nvPr/>
         </p:nvSpPr>
         <p:spPr>
           <a:xfrm>
-            <a:off x="7100000" y="1500000"/>
-            <a:ext cx="4200000" cy="1100000"/>
+            <a:off x="7000000" y="2000000"/>
+            <a:ext cx="5000000" cy="400000"/>
           </a:xfrm>
           <a:prstGeom prst="rect">
             <a:avLst/>
@@ -4812,27 +4363,27 @@
           <a:p>
             <a:pPr algn="l"/>
             <a:r>
-              <a:rPr sz="1600" b="0">
-                <a:solidFill>
-                  <a:srgbClr val="1A1714"/>
+              <a:rPr sz="1800" b="1">
+                <a:solidFill>
+                  <a:srgbClr val="8B6B22"/>
                 </a:solidFill>
                 <a:latin typeface="DM Sans"/>
               </a:rPr>
-              <a:t>①  IndexedDB stores the pending check-in.</a:t>
-            </a:r>
-          </a:p>
-        </p:txBody>
-      </p:sp>
-      <p:sp>
-        <p:nvSpPr>
-          <p:cNvPr id="5" name="TextBox 4"/>
+              <a:t>Related decks</a:t>
+            </a:r>
+          </a:p>
+        </p:txBody>
+      </p:sp>
+      <p:sp>
+        <p:nvSpPr>
+          <p:cNvPr id="7" name="TextBox 6"/>
           <p:cNvSpPr txBox="1"/>
           <p:nvPr/>
         </p:nvSpPr>
         <p:spPr>
           <a:xfrm>
-            <a:off x="7100000" y="2800000"/>
-            <a:ext cx="4200000" cy="1100000"/>
+            <a:off x="7000000" y="2500000"/>
+            <a:ext cx="5000000" cy="400000"/>
           </a:xfrm>
           <a:prstGeom prst="rect">
             <a:avLst/>
@@ -4847,27 +4398,27 @@
           <a:p>
             <a:pPr algn="l"/>
             <a:r>
-              <a:rPr sz="1600" b="0">
+              <a:rPr sz="1400" b="0">
                 <a:solidFill>
                   <a:srgbClr val="1A1714"/>
                 </a:solidFill>
                 <a:latin typeface="DM Sans"/>
               </a:rPr>
-              <a:t>②  Background Sync replays when online.</a:t>
-            </a:r>
-          </a:p>
-        </p:txBody>
-      </p:sp>
-      <p:sp>
-        <p:nvSpPr>
-          <p:cNvPr id="6" name="TextBox 5"/>
+              <a:t>Deck 06 · The Notifications Engine</a:t>
+            </a:r>
+          </a:p>
+        </p:txBody>
+      </p:sp>
+      <p:sp>
+        <p:nvSpPr>
+          <p:cNvPr id="8" name="TextBox 7"/>
           <p:cNvSpPr txBox="1"/>
           <p:nvPr/>
         </p:nvSpPr>
         <p:spPr>
           <a:xfrm>
-            <a:off x="7100000" y="4100000"/>
-            <a:ext cx="4200000" cy="1100000"/>
+            <a:off x="7000000" y="2900000"/>
+            <a:ext cx="5000000" cy="400000"/>
           </a:xfrm>
           <a:prstGeom prst="rect">
             <a:avLst/>
@@ -4882,27 +4433,27 @@
           <a:p>
             <a:pPr algn="l"/>
             <a:r>
-              <a:rPr sz="1600" b="0">
+              <a:rPr sz="1400" b="0">
                 <a:solidFill>
                   <a:srgbClr val="1A1714"/>
                 </a:solidFill>
                 <a:latin typeface="DM Sans"/>
               </a:rPr>
-              <a:t>③  iOS gets a flush-queue message fallback.</a:t>
-            </a:r>
-          </a:p>
-        </p:txBody>
-      </p:sp>
-      <p:sp>
-        <p:nvSpPr>
-          <p:cNvPr id="7" name="TextBox 6"/>
+              <a:t>Deck 09 · Reception Workflow</a:t>
+            </a:r>
+          </a:p>
+        </p:txBody>
+      </p:sp>
+      <p:sp>
+        <p:nvSpPr>
+          <p:cNvPr id="9" name="TextBox 8"/>
           <p:cNvSpPr txBox="1"/>
           <p:nvPr/>
         </p:nvSpPr>
         <p:spPr>
           <a:xfrm>
-            <a:off x="800000" y="6100000"/>
-            <a:ext cx="10500000" cy="300000"/>
+            <a:off x="7000000" y="3300000"/>
+            <a:ext cx="5000000" cy="400000"/>
           </a:xfrm>
           <a:prstGeom prst="rect">
             <a:avLst/>
@@ -4917,27 +4468,27 @@
           <a:p>
             <a:pPr algn="l"/>
             <a:r>
-              <a:rPr sz="1100" b="0">
-                <a:solidFill>
-                  <a:srgbClr val="8B6B22"/>
+              <a:rPr sz="1400" b="0">
+                <a:solidFill>
+                  <a:srgbClr val="1A1714"/>
                 </a:solidFill>
                 <a:latin typeface="DM Sans"/>
               </a:rPr>
-              <a:t>Chrome DevTools — Application → IndexedDB.</a:t>
-            </a:r>
-          </a:p>
-        </p:txBody>
-      </p:sp>
-      <p:sp>
-        <p:nvSpPr>
-          <p:cNvPr id="8" name="TextBox 7"/>
+              <a:t>Deck 11 · Director Visibility</a:t>
+            </a:r>
+          </a:p>
+        </p:txBody>
+      </p:sp>
+      <p:sp>
+        <p:nvSpPr>
+          <p:cNvPr id="10" name="TextBox 9"/>
           <p:cNvSpPr txBox="1"/>
           <p:nvPr/>
         </p:nvSpPr>
         <p:spPr>
           <a:xfrm>
-            <a:off x="8000000" y="6500000"/>
-            <a:ext cx="4000000" cy="300000"/>
+            <a:off x="1000000" y="6300000"/>
+            <a:ext cx="10000000" cy="400000"/>
           </a:xfrm>
           <a:prstGeom prst="rect">
             <a:avLst/>
@@ -4950,55 +4501,29 @@
           </a:bodyPr>
           <a:lstStyle/>
           <a:p>
-            <a:pPr algn="r"/>
+            <a:pPr algn="ctr"/>
             <a:r>
               <a:rPr sz="1100" b="0">
                 <a:solidFill>
-                  <a:srgbClr val="D8CFBE"/>
+                  <a:srgbClr val="8B6B22"/>
                 </a:solidFill>
                 <a:latin typeface="DM Sans"/>
               </a:rPr>
-              <a:t>02 · SmartGate — Visitor Management · 16/20</a:t>
-            </a:r>
-          </a:p>
-        </p:txBody>
-      </p:sp>
-    </p:spTree>
-  </p:cSld>
-  <p:clrMapOvr>
-    <a:masterClrMapping/>
-  </p:clrMapOvr>
-</p:sld>
-</file>
-
-<file path=ppt/slides/slide17.xml><?xml version="1.0" encoding="utf-8"?>
-<p:sld xmlns:a="http://schemas.openxmlformats.org/drawingml/2006/main" xmlns:p="http://schemas.openxmlformats.org/presentationml/2006/main" xmlns:r="http://schemas.openxmlformats.org/officeDocument/2006/relationships">
-  <p:cSld>
-    <p:bg>
-      <p:bgPr>
-        <a:solidFill>
-          <a:srgbClr val="F6F1E7"/>
-        </a:solidFill>
-        <a:effectLst/>
-      </p:bgPr>
-    </p:bg>
-    <p:spTree>
-      <p:nvGrpSpPr>
-        <p:cNvPr id="1" name=""/>
-        <p:cNvGrpSpPr/>
-        <p:nvPr/>
-      </p:nvGrpSpPr>
-      <p:grpSpPr/>
-      <p:sp>
-        <p:nvSpPr>
-          <p:cNvPr id="2" name="TextBox 1"/>
+              <a:t>Built on Cloudflare's edge · Designed in the Kente Executive language</a:t>
+            </a:r>
+          </a:p>
+        </p:txBody>
+      </p:sp>
+      <p:sp>
+        <p:nvSpPr>
+          <p:cNvPr id="11" name="TextBox 10"/>
           <p:cNvSpPr txBox="1"/>
           <p:nvPr/>
         </p:nvSpPr>
         <p:spPr>
           <a:xfrm>
-            <a:off x="1200000" y="2200000"/>
-            <a:ext cx="9700000" cy="1500000"/>
+            <a:off x="8000000" y="6500000"/>
+            <a:ext cx="4000000" cy="300000"/>
           </a:xfrm>
           <a:prstGeom prst="rect">
             <a:avLst/>
@@ -5011,349 +4536,15 @@
           </a:bodyPr>
           <a:lstStyle/>
           <a:p>
-            <a:pPr algn="ctr"/>
-            <a:r>
-              <a:rPr sz="4400" b="1">
-                <a:solidFill>
-                  <a:srgbClr val="0E1411"/>
-                </a:solidFill>
-                <a:latin typeface="Playfair Display"/>
-              </a:rPr>
-              <a:t>One workflow. Six roles. No leakage.</a:t>
-            </a:r>
-          </a:p>
-        </p:txBody>
-      </p:sp>
-      <p:pic>
-        <p:nvPicPr>
-          <p:cNvPr id="3" name="Picture 2" descr="gold-deco-hairline.png"/>
-          <p:cNvPicPr>
-            <a:picLocks noChangeAspect="1"/>
-          </p:cNvPicPr>
-          <p:nvPr/>
-        </p:nvPicPr>
-        <p:blipFill>
-          <a:blip r:embed="rId2"/>
-          <a:stretch>
-            <a:fillRect/>
-          </a:stretch>
-        </p:blipFill>
-        <p:spPr>
-          <a:xfrm>
-            <a:off x="5896000" y="3800000"/>
-            <a:ext cx="400000" cy="20000"/>
-          </a:xfrm>
-          <a:prstGeom prst="rect">
-            <a:avLst/>
-          </a:prstGeom>
-        </p:spPr>
-      </p:pic>
-      <p:sp>
-        <p:nvSpPr>
-          <p:cNvPr id="4" name="TextBox 3"/>
-          <p:cNvSpPr txBox="1"/>
-          <p:nvPr/>
-        </p:nvSpPr>
-        <p:spPr>
-          <a:xfrm>
-            <a:off x="1500000" y="4100000"/>
-            <a:ext cx="9100000" cy="1200000"/>
-          </a:xfrm>
-          <a:prstGeom prst="rect">
-            <a:avLst/>
-          </a:prstGeom>
-          <a:noFill/>
-        </p:spPr>
-        <p:txBody>
-          <a:bodyPr wrap="square">
-            <a:spAutoFit/>
-          </a:bodyPr>
-          <a:lstStyle/>
-          <a:p>
-            <a:pPr algn="ctr"/>
-            <a:r>
-              <a:rPr sz="2200" b="0">
-                <a:solidFill>
-                  <a:srgbClr val="1A1714"/>
+            <a:pPr algn="r"/>
+            <a:r>
+              <a:rPr sz="1100" b="0">
+                <a:solidFill>
+                  <a:srgbClr val="D8CFBE"/>
                 </a:solidFill>
                 <a:latin typeface="DM Sans"/>
               </a:rPr>
-              <a:t>Receptionists check in. Directors see their directorate. Admins see everything. RBAC, enforced.</a:t>
-            </a:r>
-          </a:p>
-        </p:txBody>
-      </p:sp>
-      <p:sp>
-        <p:nvSpPr>
-          <p:cNvPr id="5" name="TextBox 4"/>
-          <p:cNvSpPr txBox="1"/>
-          <p:nvPr/>
-        </p:nvSpPr>
-        <p:spPr>
-          <a:xfrm>
-            <a:off x="8000000" y="6500000"/>
-            <a:ext cx="4000000" cy="300000"/>
-          </a:xfrm>
-          <a:prstGeom prst="rect">
-            <a:avLst/>
-          </a:prstGeom>
-          <a:noFill/>
-        </p:spPr>
-        <p:txBody>
-          <a:bodyPr wrap="square">
-            <a:spAutoFit/>
-          </a:bodyPr>
-          <a:lstStyle/>
-          <a:p>
-            <a:pPr algn="r"/>
-            <a:r>
-              <a:rPr sz="1100" b="0">
-                <a:solidFill>
-                  <a:srgbClr val="D8CFBE"/>
-                </a:solidFill>
-                <a:latin typeface="DM Sans"/>
-              </a:rPr>
-              <a:t>02 · SmartGate — Visitor Management · 17/20</a:t>
-            </a:r>
-          </a:p>
-        </p:txBody>
-      </p:sp>
-    </p:spTree>
-  </p:cSld>
-  <p:clrMapOvr>
-    <a:masterClrMapping/>
-  </p:clrMapOvr>
-</p:sld>
-</file>
-
-<file path=ppt/slides/slide18.xml><?xml version="1.0" encoding="utf-8"?>
-<p:sld xmlns:a="http://schemas.openxmlformats.org/drawingml/2006/main" xmlns:p="http://schemas.openxmlformats.org/presentationml/2006/main" xmlns:r="http://schemas.openxmlformats.org/officeDocument/2006/relationships">
-  <p:cSld>
-    <p:bg>
-      <p:bgPr>
-        <a:solidFill>
-          <a:srgbClr val="F6F1E7"/>
-        </a:solidFill>
-        <a:effectLst/>
-      </p:bgPr>
-    </p:bg>
-    <p:spTree>
-      <p:nvGrpSpPr>
-        <p:cNvPr id="1" name=""/>
-        <p:cNvGrpSpPr/>
-        <p:nvPr/>
-      </p:nvGrpSpPr>
-      <p:grpSpPr/>
-      <p:sp>
-        <p:nvSpPr>
-          <p:cNvPr id="2" name="TextBox 1"/>
-          <p:cNvSpPr txBox="1"/>
-          <p:nvPr/>
-        </p:nvSpPr>
-        <p:spPr>
-          <a:xfrm>
-            <a:off x="1200000" y="2200000"/>
-            <a:ext cx="9700000" cy="1500000"/>
-          </a:xfrm>
-          <a:prstGeom prst="rect">
-            <a:avLst/>
-          </a:prstGeom>
-          <a:noFill/>
-        </p:spPr>
-        <p:txBody>
-          <a:bodyPr wrap="square">
-            <a:spAutoFit/>
-          </a:bodyPr>
-          <a:lstStyle/>
-          <a:p>
-            <a:pPr algn="ctr"/>
-            <a:r>
-              <a:rPr sz="4400" b="1">
-                <a:solidFill>
-                  <a:srgbClr val="0E1411"/>
-                </a:solidFill>
-                <a:latin typeface="Playfair Display"/>
-              </a:rPr>
-              <a:t>One feature deserves a quote.</a:t>
-            </a:r>
-          </a:p>
-        </p:txBody>
-      </p:sp>
-      <p:pic>
-        <p:nvPicPr>
-          <p:cNvPr id="3" name="Picture 2" descr="gold-deco-hairline.png"/>
-          <p:cNvPicPr>
-            <a:picLocks noChangeAspect="1"/>
-          </p:cNvPicPr>
-          <p:nvPr/>
-        </p:nvPicPr>
-        <p:blipFill>
-          <a:blip r:embed="rId2"/>
-          <a:stretch>
-            <a:fillRect/>
-          </a:stretch>
-        </p:blipFill>
-        <p:spPr>
-          <a:xfrm>
-            <a:off x="5896000" y="3800000"/>
-            <a:ext cx="400000" cy="20000"/>
-          </a:xfrm>
-          <a:prstGeom prst="rect">
-            <a:avLst/>
-          </a:prstGeom>
-        </p:spPr>
-      </p:pic>
-      <p:sp>
-        <p:nvSpPr>
-          <p:cNvPr id="4" name="TextBox 3"/>
-          <p:cNvSpPr txBox="1"/>
-          <p:nvPr/>
-        </p:nvSpPr>
-        <p:spPr>
-          <a:xfrm>
-            <a:off x="1500000" y="4100000"/>
-            <a:ext cx="9100000" cy="1200000"/>
-          </a:xfrm>
-          <a:prstGeom prst="rect">
-            <a:avLst/>
-          </a:prstGeom>
-          <a:noFill/>
-        </p:spPr>
-        <p:txBody>
-          <a:bodyPr wrap="square">
-            <a:spAutoFit/>
-          </a:bodyPr>
-          <a:lstStyle/>
-          <a:p>
-            <a:pPr algn="ctr"/>
-            <a:r>
-              <a:rPr sz="2200" b="0">
-                <a:solidFill>
-                  <a:srgbClr val="1A1714"/>
-                </a:solidFill>
-                <a:latin typeface="DM Sans"/>
-              </a:rPr>
-              <a:t>"&lt;Q03&gt;"</a:t>
-            </a:r>
-          </a:p>
-        </p:txBody>
-      </p:sp>
-      <p:sp>
-        <p:nvSpPr>
-          <p:cNvPr id="5" name="TextBox 4"/>
-          <p:cNvSpPr txBox="1"/>
-          <p:nvPr/>
-        </p:nvSpPr>
-        <p:spPr>
-          <a:xfrm>
-            <a:off x="8000000" y="6500000"/>
-            <a:ext cx="4000000" cy="300000"/>
-          </a:xfrm>
-          <a:prstGeom prst="rect">
-            <a:avLst/>
-          </a:prstGeom>
-          <a:noFill/>
-        </p:spPr>
-        <p:txBody>
-          <a:bodyPr wrap="square">
-            <a:spAutoFit/>
-          </a:bodyPr>
-          <a:lstStyle/>
-          <a:p>
-            <a:pPr algn="r"/>
-            <a:r>
-              <a:rPr sz="1100" b="0">
-                <a:solidFill>
-                  <a:srgbClr val="D8CFBE"/>
-                </a:solidFill>
-                <a:latin typeface="DM Sans"/>
-              </a:rPr>
-              <a:t>02 · SmartGate — Visitor Management · 18/20</a:t>
-            </a:r>
-          </a:p>
-        </p:txBody>
-      </p:sp>
-    </p:spTree>
-  </p:cSld>
-  <p:clrMapOvr>
-    <a:masterClrMapping/>
-  </p:clrMapOvr>
-</p:sld>
-</file>
-
-<file path=ppt/slides/slide19.xml><?xml version="1.0" encoding="utf-8"?>
-<p:sld xmlns:a="http://schemas.openxmlformats.org/drawingml/2006/main" xmlns:p="http://schemas.openxmlformats.org/presentationml/2006/main" xmlns:r="http://schemas.openxmlformats.org/officeDocument/2006/relationships">
-  <p:cSld>
-    <p:bg>
-      <p:bgPr>
-        <a:solidFill>
-          <a:srgbClr val="0E1411"/>
-        </a:solidFill>
-        <a:effectLst/>
-      </p:bgPr>
-    </p:bg>
-    <p:spTree>
-      <p:nvGrpSpPr>
-        <p:cNvPr id="1" name=""/>
-        <p:cNvGrpSpPr/>
-        <p:nvPr/>
-      </p:nvGrpSpPr>
-      <p:grpSpPr/>
-      <p:pic>
-        <p:nvPicPr>
-          <p:cNvPr id="2" name="Picture 1" descr="kente-texture-overlay.png"/>
-          <p:cNvPicPr>
-            <a:picLocks noChangeAspect="1"/>
-          </p:cNvPicPr>
-          <p:nvPr/>
-        </p:nvPicPr>
-        <p:blipFill>
-          <a:blip r:embed="rId2"/>
-          <a:stretch>
-            <a:fillRect/>
-          </a:stretch>
-        </p:blipFill>
-        <p:spPr>
-          <a:xfrm>
-            <a:off x="0" y="0"/>
-            <a:ext cx="12192000" cy="6858000"/>
-          </a:xfrm>
-          <a:prstGeom prst="rect">
-            <a:avLst/>
-          </a:prstGeom>
-        </p:spPr>
-      </p:pic>
-      <p:sp>
-        <p:nvSpPr>
-          <p:cNvPr id="3" name="TextBox 2"/>
-          <p:cNvSpPr txBox="1"/>
-          <p:nvPr/>
-        </p:nvSpPr>
-        <p:spPr>
-          <a:xfrm>
-            <a:off x="1600000" y="2800000"/>
-            <a:ext cx="8900000" cy="2000000"/>
-          </a:xfrm>
-          <a:prstGeom prst="rect">
-            <a:avLst/>
-          </a:prstGeom>
-          <a:noFill/>
-        </p:spPr>
-        <p:txBody>
-          <a:bodyPr wrap="square">
-            <a:spAutoFit/>
-          </a:bodyPr>
-          <a:lstStyle/>
-          <a:p>
-            <a:pPr algn="ctr"/>
-            <a:r>
-              <a:rPr sz="4400" b="0">
-                <a:solidFill>
-                  <a:srgbClr val="F6F1E7"/>
-                </a:solidFill>
-                <a:latin typeface="Playfair Display"/>
-              </a:rPr>
-              <a:t>SmartGate works because reception didn't have to learn it. They already knew it.</a:t>
+              <a:t>02 · SmartGate — Visitor Management · 15/15</a:t>
             </a:r>
           </a:p>
         </p:txBody>
@@ -5451,382 +4642,6 @@
 </p:sld>
 </file>
 
-<file path=ppt/slides/slide20.xml><?xml version="1.0" encoding="utf-8"?>
-<p:sld xmlns:a="http://schemas.openxmlformats.org/drawingml/2006/main" xmlns:p="http://schemas.openxmlformats.org/presentationml/2006/main" xmlns:r="http://schemas.openxmlformats.org/officeDocument/2006/relationships">
-  <p:cSld>
-    <p:bg>
-      <p:bgPr>
-        <a:solidFill>
-          <a:srgbClr val="F6F1E7"/>
-        </a:solidFill>
-        <a:effectLst/>
-      </p:bgPr>
-    </p:bg>
-    <p:spTree>
-      <p:nvGrpSpPr>
-        <p:cNvPr id="1" name=""/>
-        <p:cNvGrpSpPr/>
-        <p:nvPr/>
-      </p:nvGrpSpPr>
-      <p:grpSpPr/>
-      <p:sp>
-        <p:nvSpPr>
-          <p:cNvPr id="2" name="TextBox 1"/>
-          <p:cNvSpPr txBox="1"/>
-          <p:nvPr/>
-        </p:nvSpPr>
-        <p:spPr>
-          <a:xfrm>
-            <a:off x="1000000" y="800000"/>
-            <a:ext cx="10000000" cy="700000"/>
-          </a:xfrm>
-          <a:prstGeom prst="rect">
-            <a:avLst/>
-          </a:prstGeom>
-          <a:noFill/>
-        </p:spPr>
-        <p:txBody>
-          <a:bodyPr wrap="square">
-            <a:spAutoFit/>
-          </a:bodyPr>
-          <a:lstStyle/>
-          <a:p>
-            <a:pPr algn="l"/>
-            <a:r>
-              <a:rPr sz="4400" b="1">
-                <a:solidFill>
-                  <a:srgbClr val="0E1411"/>
-                </a:solidFill>
-                <a:latin typeface="Playfair Display"/>
-              </a:rPr>
-              <a:t>Appendix</a:t>
-            </a:r>
-          </a:p>
-        </p:txBody>
-      </p:sp>
-      <p:sp>
-        <p:nvSpPr>
-          <p:cNvPr id="3" name="TextBox 2"/>
-          <p:cNvSpPr txBox="1"/>
-          <p:nvPr/>
-        </p:nvSpPr>
-        <p:spPr>
-          <a:xfrm>
-            <a:off x="1000000" y="2000000"/>
-            <a:ext cx="5000000" cy="400000"/>
-          </a:xfrm>
-          <a:prstGeom prst="rect">
-            <a:avLst/>
-          </a:prstGeom>
-          <a:noFill/>
-        </p:spPr>
-        <p:txBody>
-          <a:bodyPr wrap="square">
-            <a:spAutoFit/>
-          </a:bodyPr>
-          <a:lstStyle/>
-          <a:p>
-            <a:pPr algn="l"/>
-            <a:r>
-              <a:rPr sz="1800" b="1">
-                <a:solidFill>
-                  <a:srgbClr val="8B6B22"/>
-                </a:solidFill>
-                <a:latin typeface="DM Sans"/>
-              </a:rPr>
-              <a:t>Live URLs</a:t>
-            </a:r>
-          </a:p>
-        </p:txBody>
-      </p:sp>
-      <p:sp>
-        <p:nvSpPr>
-          <p:cNvPr id="4" name="TextBox 3"/>
-          <p:cNvSpPr txBox="1"/>
-          <p:nvPr/>
-        </p:nvSpPr>
-        <p:spPr>
-          <a:xfrm>
-            <a:off x="1000000" y="2500000"/>
-            <a:ext cx="5000000" cy="400000"/>
-          </a:xfrm>
-          <a:prstGeom prst="rect">
-            <a:avLst/>
-          </a:prstGeom>
-          <a:noFill/>
-        </p:spPr>
-        <p:txBody>
-          <a:bodyPr wrap="square">
-            <a:spAutoFit/>
-          </a:bodyPr>
-          <a:lstStyle/>
-          <a:p>
-            <a:pPr algn="l"/>
-            <a:r>
-              <a:rPr sz="1400" b="0">
-                <a:solidFill>
-                  <a:srgbClr val="1A1714"/>
-                </a:solidFill>
-                <a:latin typeface="DM Sans"/>
-              </a:rPr>
-              <a:t>ohcs-smartgate.pages.dev</a:t>
-            </a:r>
-          </a:p>
-        </p:txBody>
-      </p:sp>
-      <p:sp>
-        <p:nvSpPr>
-          <p:cNvPr id="5" name="TextBox 4"/>
-          <p:cNvSpPr txBox="1"/>
-          <p:nvPr/>
-        </p:nvSpPr>
-        <p:spPr>
-          <a:xfrm>
-            <a:off x="1000000" y="2900000"/>
-            <a:ext cx="5000000" cy="400000"/>
-          </a:xfrm>
-          <a:prstGeom prst="rect">
-            <a:avLst/>
-          </a:prstGeom>
-          <a:noFill/>
-        </p:spPr>
-        <p:txBody>
-          <a:bodyPr wrap="square">
-            <a:spAutoFit/>
-          </a:bodyPr>
-          <a:lstStyle/>
-          <a:p>
-            <a:pPr algn="l"/>
-            <a:r>
-              <a:rPr sz="1400" b="0">
-                <a:solidFill>
-                  <a:srgbClr val="1A1714"/>
-                </a:solidFill>
-                <a:latin typeface="DM Sans"/>
-              </a:rPr>
-              <a:t>ohcs-smartgate-api.ghwmelite.workers.dev</a:t>
-            </a:r>
-          </a:p>
-        </p:txBody>
-      </p:sp>
-      <p:sp>
-        <p:nvSpPr>
-          <p:cNvPr id="6" name="TextBox 5"/>
-          <p:cNvSpPr txBox="1"/>
-          <p:nvPr/>
-        </p:nvSpPr>
-        <p:spPr>
-          <a:xfrm>
-            <a:off x="7000000" y="2000000"/>
-            <a:ext cx="5000000" cy="400000"/>
-          </a:xfrm>
-          <a:prstGeom prst="rect">
-            <a:avLst/>
-          </a:prstGeom>
-          <a:noFill/>
-        </p:spPr>
-        <p:txBody>
-          <a:bodyPr wrap="square">
-            <a:spAutoFit/>
-          </a:bodyPr>
-          <a:lstStyle/>
-          <a:p>
-            <a:pPr algn="l"/>
-            <a:r>
-              <a:rPr sz="1800" b="1">
-                <a:solidFill>
-                  <a:srgbClr val="8B6B22"/>
-                </a:solidFill>
-                <a:latin typeface="DM Sans"/>
-              </a:rPr>
-              <a:t>Related decks</a:t>
-            </a:r>
-          </a:p>
-        </p:txBody>
-      </p:sp>
-      <p:sp>
-        <p:nvSpPr>
-          <p:cNvPr id="7" name="TextBox 6"/>
-          <p:cNvSpPr txBox="1"/>
-          <p:nvPr/>
-        </p:nvSpPr>
-        <p:spPr>
-          <a:xfrm>
-            <a:off x="7000000" y="2500000"/>
-            <a:ext cx="5000000" cy="400000"/>
-          </a:xfrm>
-          <a:prstGeom prst="rect">
-            <a:avLst/>
-          </a:prstGeom>
-          <a:noFill/>
-        </p:spPr>
-        <p:txBody>
-          <a:bodyPr wrap="square">
-            <a:spAutoFit/>
-          </a:bodyPr>
-          <a:lstStyle/>
-          <a:p>
-            <a:pPr algn="l"/>
-            <a:r>
-              <a:rPr sz="1400" b="0">
-                <a:solidFill>
-                  <a:srgbClr val="1A1714"/>
-                </a:solidFill>
-                <a:latin typeface="DM Sans"/>
-              </a:rPr>
-              <a:t>Deck 06 · The Notifications Engine</a:t>
-            </a:r>
-          </a:p>
-        </p:txBody>
-      </p:sp>
-      <p:sp>
-        <p:nvSpPr>
-          <p:cNvPr id="8" name="TextBox 7"/>
-          <p:cNvSpPr txBox="1"/>
-          <p:nvPr/>
-        </p:nvSpPr>
-        <p:spPr>
-          <a:xfrm>
-            <a:off x="7000000" y="2900000"/>
-            <a:ext cx="5000000" cy="400000"/>
-          </a:xfrm>
-          <a:prstGeom prst="rect">
-            <a:avLst/>
-          </a:prstGeom>
-          <a:noFill/>
-        </p:spPr>
-        <p:txBody>
-          <a:bodyPr wrap="square">
-            <a:spAutoFit/>
-          </a:bodyPr>
-          <a:lstStyle/>
-          <a:p>
-            <a:pPr algn="l"/>
-            <a:r>
-              <a:rPr sz="1400" b="0">
-                <a:solidFill>
-                  <a:srgbClr val="1A1714"/>
-                </a:solidFill>
-                <a:latin typeface="DM Sans"/>
-              </a:rPr>
-              <a:t>Deck 09 · Reception Workflow</a:t>
-            </a:r>
-          </a:p>
-        </p:txBody>
-      </p:sp>
-      <p:sp>
-        <p:nvSpPr>
-          <p:cNvPr id="9" name="TextBox 8"/>
-          <p:cNvSpPr txBox="1"/>
-          <p:nvPr/>
-        </p:nvSpPr>
-        <p:spPr>
-          <a:xfrm>
-            <a:off x="7000000" y="3300000"/>
-            <a:ext cx="5000000" cy="400000"/>
-          </a:xfrm>
-          <a:prstGeom prst="rect">
-            <a:avLst/>
-          </a:prstGeom>
-          <a:noFill/>
-        </p:spPr>
-        <p:txBody>
-          <a:bodyPr wrap="square">
-            <a:spAutoFit/>
-          </a:bodyPr>
-          <a:lstStyle/>
-          <a:p>
-            <a:pPr algn="l"/>
-            <a:r>
-              <a:rPr sz="1400" b="0">
-                <a:solidFill>
-                  <a:srgbClr val="1A1714"/>
-                </a:solidFill>
-                <a:latin typeface="DM Sans"/>
-              </a:rPr>
-              <a:t>Deck 11 · Director Visibility</a:t>
-            </a:r>
-          </a:p>
-        </p:txBody>
-      </p:sp>
-      <p:sp>
-        <p:nvSpPr>
-          <p:cNvPr id="10" name="TextBox 9"/>
-          <p:cNvSpPr txBox="1"/>
-          <p:nvPr/>
-        </p:nvSpPr>
-        <p:spPr>
-          <a:xfrm>
-            <a:off x="1000000" y="6300000"/>
-            <a:ext cx="10000000" cy="400000"/>
-          </a:xfrm>
-          <a:prstGeom prst="rect">
-            <a:avLst/>
-          </a:prstGeom>
-          <a:noFill/>
-        </p:spPr>
-        <p:txBody>
-          <a:bodyPr wrap="square">
-            <a:spAutoFit/>
-          </a:bodyPr>
-          <a:lstStyle/>
-          <a:p>
-            <a:pPr algn="ctr"/>
-            <a:r>
-              <a:rPr sz="1100" b="0">
-                <a:solidFill>
-                  <a:srgbClr val="8B6B22"/>
-                </a:solidFill>
-                <a:latin typeface="DM Sans"/>
-              </a:rPr>
-              <a:t>Built on Cloudflare's edge · Designed in the Kente Executive language</a:t>
-            </a:r>
-          </a:p>
-        </p:txBody>
-      </p:sp>
-      <p:sp>
-        <p:nvSpPr>
-          <p:cNvPr id="11" name="TextBox 10"/>
-          <p:cNvSpPr txBox="1"/>
-          <p:nvPr/>
-        </p:nvSpPr>
-        <p:spPr>
-          <a:xfrm>
-            <a:off x="8000000" y="6500000"/>
-            <a:ext cx="4000000" cy="300000"/>
-          </a:xfrm>
-          <a:prstGeom prst="rect">
-            <a:avLst/>
-          </a:prstGeom>
-          <a:noFill/>
-        </p:spPr>
-        <p:txBody>
-          <a:bodyPr wrap="square">
-            <a:spAutoFit/>
-          </a:bodyPr>
-          <a:lstStyle/>
-          <a:p>
-            <a:pPr algn="r"/>
-            <a:r>
-              <a:rPr sz="1100" b="0">
-                <a:solidFill>
-                  <a:srgbClr val="D8CFBE"/>
-                </a:solidFill>
-                <a:latin typeface="DM Sans"/>
-              </a:rPr>
-              <a:t>02 · SmartGate — Visitor Management · 20/20</a:t>
-            </a:r>
-          </a:p>
-        </p:txBody>
-      </p:sp>
-    </p:spTree>
-  </p:cSld>
-  <p:clrMapOvr>
-    <a:masterClrMapping/>
-  </p:clrMapOvr>
-</p:sld>
-</file>
-
 <file path=ppt/slides/slide3.xml><?xml version="1.0" encoding="utf-8"?>
 <p:sld xmlns:a="http://schemas.openxmlformats.org/drawingml/2006/main" xmlns:p="http://schemas.openxmlformats.org/presentationml/2006/main" xmlns:r="http://schemas.openxmlformats.org/officeDocument/2006/relationships">
   <p:cSld>
@@ -5910,7 +4725,7 @@
                 </a:solidFill>
                 <a:latin typeface="DM Sans"/>
               </a:rPr>
-              <a:t>02 · SmartGate — Visitor Management · 03/20</a:t>
+              <a:t>02 · SmartGate — Visitor Management · 03/15</a:t>
             </a:r>
           </a:p>
         </p:txBody>
@@ -6065,7 +4880,7 @@
                 </a:solidFill>
                 <a:latin typeface="DM Sans"/>
               </a:rPr>
-              <a:t>02 · SmartGate — Visitor Management · 04/20</a:t>
+              <a:t>02 · SmartGate — Visitor Management · 04/15</a:t>
             </a:r>
           </a:p>
         </p:txBody>
@@ -6355,7 +5170,7 @@
                 </a:solidFill>
                 <a:latin typeface="DM Sans"/>
               </a:rPr>
-              <a:t>02 · SmartGate — Visitor Management · 05/20</a:t>
+              <a:t>02 · SmartGate — Visitor Management · 05/15</a:t>
             </a:r>
           </a:p>
         </p:txBody>
@@ -6394,8 +5209,8 @@
         </p:nvSpPr>
         <p:spPr>
           <a:xfrm>
-            <a:off x="800000" y="500000"/>
-            <a:ext cx="10500000" cy="700000"/>
+            <a:off x="1200000" y="2200000"/>
+            <a:ext cx="9700000" cy="1500000"/>
           </a:xfrm>
           <a:prstGeom prst="rect">
             <a:avLst/>
@@ -6408,73 +5223,43 @@
           </a:bodyPr>
           <a:lstStyle/>
           <a:p>
-            <a:pPr algn="l"/>
-            <a:r>
-              <a:rPr sz="3200" b="1">
+            <a:pPr algn="ctr"/>
+            <a:r>
+              <a:rPr sz="4400" b="1">
                 <a:solidFill>
                   <a:srgbClr val="0E1411"/>
                 </a:solidFill>
-                <a:latin typeface="DM Sans"/>
-              </a:rPr>
-              <a:t>The form, mid-fill</a:t>
-            </a:r>
-          </a:p>
-        </p:txBody>
-      </p:sp>
-      <p:sp>
-        <p:nvSpPr>
-          <p:cNvPr id="3" name="Rectangle 2"/>
-          <p:cNvSpPr/>
-          <p:nvPr/>
-        </p:nvSpPr>
-        <p:spPr>
-          <a:xfrm>
-            <a:off x="800000" y="1500000"/>
-            <a:ext cx="5800000" cy="4500000"/>
-          </a:xfrm>
-          <a:prstGeom prst="rect">
-            <a:avLst/>
-          </a:prstGeom>
-          <a:solidFill>
-            <a:srgbClr val="FBF7EF"/>
-          </a:solidFill>
-          <a:ln>
-            <a:solidFill>
-              <a:srgbClr val="D8CFBE"/>
-            </a:solidFill>
-          </a:ln>
-        </p:spPr>
-        <p:style>
-          <a:lnRef idx="1">
-            <a:schemeClr val="accent1"/>
-          </a:lnRef>
-          <a:fillRef idx="3">
-            <a:schemeClr val="accent1"/>
-          </a:fillRef>
-          <a:effectRef idx="2">
-            <a:schemeClr val="accent1"/>
-          </a:effectRef>
-          <a:fontRef idx="minor">
-            <a:schemeClr val="lt1"/>
-          </a:fontRef>
-        </p:style>
-        <p:txBody>
-          <a:bodyPr rtlCol="0" anchor="ctr"/>
-          <a:lstStyle/>
-          <a:p>
-            <a:pPr algn="ctr"/>
-            <a:r>
-              <a:rPr sz="1100">
-                <a:solidFill>
-                  <a:srgbClr val="8B6B22"/>
-                </a:solidFill>
-                <a:latin typeface="DM Sans"/>
-              </a:rPr>
-              <a:t>[REPLACE: S02-checkin-form-midfill.png]</a:t>
-            </a:r>
-          </a:p>
-        </p:txBody>
-      </p:sp>
+                <a:latin typeface="Playfair Display"/>
+              </a:rPr>
+              <a:t>The badge prints. The alert fires.</a:t>
+            </a:r>
+          </a:p>
+        </p:txBody>
+      </p:sp>
+      <p:pic>
+        <p:nvPicPr>
+          <p:cNvPr id="3" name="Picture 2" descr="gold-deco-hairline.png"/>
+          <p:cNvPicPr>
+            <a:picLocks noChangeAspect="1"/>
+          </p:cNvPicPr>
+          <p:nvPr/>
+        </p:nvPicPr>
+        <p:blipFill>
+          <a:blip r:embed="rId2"/>
+          <a:stretch>
+            <a:fillRect/>
+          </a:stretch>
+        </p:blipFill>
+        <p:spPr>
+          <a:xfrm>
+            <a:off x="5896000" y="3800000"/>
+            <a:ext cx="400000" cy="20000"/>
+          </a:xfrm>
+          <a:prstGeom prst="rect">
+            <a:avLst/>
+          </a:prstGeom>
+        </p:spPr>
+      </p:pic>
       <p:sp>
         <p:nvSpPr>
           <p:cNvPr id="4" name="TextBox 3"/>
@@ -6483,8 +5268,8 @@
         </p:nvSpPr>
         <p:spPr>
           <a:xfrm>
-            <a:off x="7100000" y="1500000"/>
-            <a:ext cx="4200000" cy="1100000"/>
+            <a:off x="1500000" y="4100000"/>
+            <a:ext cx="9100000" cy="1200000"/>
           </a:xfrm>
           <a:prstGeom prst="rect">
             <a:avLst/>
@@ -6497,15 +5282,15 @@
           </a:bodyPr>
           <a:lstStyle/>
           <a:p>
-            <a:pPr algn="l"/>
-            <a:r>
-              <a:rPr sz="1600" b="0">
+            <a:pPr algn="ctr"/>
+            <a:r>
+              <a:rPr sz="2200" b="0">
                 <a:solidFill>
                   <a:srgbClr val="1A1714"/>
                 </a:solidFill>
                 <a:latin typeface="DM Sans"/>
               </a:rPr>
-              <a:t>①  Purpose is a curated list, not free text.</a:t>
+              <a:t>Host knows before the visitor reaches the waiting area.</a:t>
             </a:r>
           </a:p>
         </p:txBody>
@@ -6518,8 +5303,8 @@
         </p:nvSpPr>
         <p:spPr>
           <a:xfrm>
-            <a:off x="7100000" y="2800000"/>
-            <a:ext cx="4200000" cy="1100000"/>
+            <a:off x="8000000" y="6500000"/>
+            <a:ext cx="4000000" cy="300000"/>
           </a:xfrm>
           <a:prstGeom prst="rect">
             <a:avLst/>
@@ -6532,120 +5317,15 @@
           </a:bodyPr>
           <a:lstStyle/>
           <a:p>
-            <a:pPr algn="l"/>
-            <a:r>
-              <a:rPr sz="1600" b="0">
-                <a:solidFill>
-                  <a:srgbClr val="1A1714"/>
+            <a:pPr algn="r"/>
+            <a:r>
+              <a:rPr sz="1100" b="0">
+                <a:solidFill>
+                  <a:srgbClr val="D8CFBE"/>
                 </a:solidFill>
                 <a:latin typeface="DM Sans"/>
               </a:rPr>
-              <a:t>②  Host's directorate auto-fills.</a:t>
-            </a:r>
-          </a:p>
-        </p:txBody>
-      </p:sp>
-      <p:sp>
-        <p:nvSpPr>
-          <p:cNvPr id="6" name="TextBox 5"/>
-          <p:cNvSpPr txBox="1"/>
-          <p:nvPr/>
-        </p:nvSpPr>
-        <p:spPr>
-          <a:xfrm>
-            <a:off x="7100000" y="4100000"/>
-            <a:ext cx="4200000" cy="1100000"/>
-          </a:xfrm>
-          <a:prstGeom prst="rect">
-            <a:avLst/>
-          </a:prstGeom>
-          <a:noFill/>
-        </p:spPr>
-        <p:txBody>
-          <a:bodyPr wrap="square">
-            <a:spAutoFit/>
-          </a:bodyPr>
-          <a:lstStyle/>
-          <a:p>
-            <a:pPr algn="l"/>
-            <a:r>
-              <a:rPr sz="1600" b="0">
-                <a:solidFill>
-                  <a:srgbClr val="1A1714"/>
-                </a:solidFill>
-                <a:latin typeface="DM Sans"/>
-              </a:rPr>
-              <a:t>③  Submit is one tap.</a:t>
-            </a:r>
-          </a:p>
-        </p:txBody>
-      </p:sp>
-      <p:sp>
-        <p:nvSpPr>
-          <p:cNvPr id="7" name="TextBox 6"/>
-          <p:cNvSpPr txBox="1"/>
-          <p:nvPr/>
-        </p:nvSpPr>
-        <p:spPr>
-          <a:xfrm>
-            <a:off x="800000" y="6100000"/>
-            <a:ext cx="10500000" cy="300000"/>
-          </a:xfrm>
-          <a:prstGeom prst="rect">
-            <a:avLst/>
-          </a:prstGeom>
-          <a:noFill/>
-        </p:spPr>
-        <p:txBody>
-          <a:bodyPr wrap="square">
-            <a:spAutoFit/>
-          </a:bodyPr>
-          <a:lstStyle/>
-          <a:p>
-            <a:pPr algn="l"/>
-            <a:r>
-              <a:rPr sz="1100" b="0">
-                <a:solidFill>
-                  <a:srgbClr val="8B6B22"/>
-                </a:solidFill>
-                <a:latin typeface="DM Sans"/>
-              </a:rPr>
-              <a:t>Same form, second screen.</a:t>
-            </a:r>
-          </a:p>
-        </p:txBody>
-      </p:sp>
-      <p:sp>
-        <p:nvSpPr>
-          <p:cNvPr id="8" name="TextBox 7"/>
-          <p:cNvSpPr txBox="1"/>
-          <p:nvPr/>
-        </p:nvSpPr>
-        <p:spPr>
-          <a:xfrm>
-            <a:off x="8000000" y="6500000"/>
-            <a:ext cx="4000000" cy="300000"/>
-          </a:xfrm>
-          <a:prstGeom prst="rect">
-            <a:avLst/>
-          </a:prstGeom>
-          <a:noFill/>
-        </p:spPr>
-        <p:txBody>
-          <a:bodyPr wrap="square">
-            <a:spAutoFit/>
-          </a:bodyPr>
-          <a:lstStyle/>
-          <a:p>
-            <a:pPr algn="r"/>
-            <a:r>
-              <a:rPr sz="1100" b="0">
-                <a:solidFill>
-                  <a:srgbClr val="D8CFBE"/>
-                </a:solidFill>
-                <a:latin typeface="DM Sans"/>
-              </a:rPr>
-              <a:t>02 · SmartGate — Visitor Management · 06/20</a:t>
+              <a:t>02 · SmartGate — Visitor Management · 06/15</a:t>
             </a:r>
           </a:p>
         </p:txBody>
@@ -6684,8 +5364,8 @@
         </p:nvSpPr>
         <p:spPr>
           <a:xfrm>
-            <a:off x="1200000" y="2200000"/>
-            <a:ext cx="9700000" cy="1500000"/>
+            <a:off x="800000" y="500000"/>
+            <a:ext cx="10500000" cy="700000"/>
           </a:xfrm>
           <a:prstGeom prst="rect">
             <a:avLst/>
@@ -6698,43 +5378,73 @@
           </a:bodyPr>
           <a:lstStyle/>
           <a:p>
+            <a:pPr algn="l"/>
+            <a:r>
+              <a:rPr sz="3200" b="1">
+                <a:solidFill>
+                  <a:srgbClr val="0E1411"/>
+                </a:solidFill>
+                <a:latin typeface="DM Sans"/>
+              </a:rPr>
+              <a:t>The visitor badge</a:t>
+            </a:r>
+          </a:p>
+        </p:txBody>
+      </p:sp>
+      <p:sp>
+        <p:nvSpPr>
+          <p:cNvPr id="3" name="Rectangle 2"/>
+          <p:cNvSpPr/>
+          <p:nvPr/>
+        </p:nvSpPr>
+        <p:spPr>
+          <a:xfrm>
+            <a:off x="800000" y="1500000"/>
+            <a:ext cx="5800000" cy="4500000"/>
+          </a:xfrm>
+          <a:prstGeom prst="rect">
+            <a:avLst/>
+          </a:prstGeom>
+          <a:solidFill>
+            <a:srgbClr val="FBF7EF"/>
+          </a:solidFill>
+          <a:ln>
+            <a:solidFill>
+              <a:srgbClr val="D8CFBE"/>
+            </a:solidFill>
+          </a:ln>
+        </p:spPr>
+        <p:style>
+          <a:lnRef idx="1">
+            <a:schemeClr val="accent1"/>
+          </a:lnRef>
+          <a:fillRef idx="3">
+            <a:schemeClr val="accent1"/>
+          </a:fillRef>
+          <a:effectRef idx="2">
+            <a:schemeClr val="accent1"/>
+          </a:effectRef>
+          <a:fontRef idx="minor">
+            <a:schemeClr val="lt1"/>
+          </a:fontRef>
+        </p:style>
+        <p:txBody>
+          <a:bodyPr rtlCol="0" anchor="ctr"/>
+          <a:lstStyle/>
+          <a:p>
             <a:pPr algn="ctr"/>
             <a:r>
-              <a:rPr sz="4400" b="1">
-                <a:solidFill>
-                  <a:srgbClr val="0E1411"/>
-                </a:solidFill>
-                <a:latin typeface="Playfair Display"/>
-              </a:rPr>
-              <a:t>The badge prints. The alert fires.</a:t>
-            </a:r>
-          </a:p>
-        </p:txBody>
-      </p:sp>
-      <p:pic>
-        <p:nvPicPr>
-          <p:cNvPr id="3" name="Picture 2" descr="gold-deco-hairline.png"/>
-          <p:cNvPicPr>
-            <a:picLocks noChangeAspect="1"/>
-          </p:cNvPicPr>
-          <p:nvPr/>
-        </p:nvPicPr>
-        <p:blipFill>
-          <a:blip r:embed="rId2"/>
-          <a:stretch>
-            <a:fillRect/>
-          </a:stretch>
-        </p:blipFill>
-        <p:spPr>
-          <a:xfrm>
-            <a:off x="5896000" y="3800000"/>
-            <a:ext cx="400000" cy="20000"/>
-          </a:xfrm>
-          <a:prstGeom prst="rect">
-            <a:avLst/>
-          </a:prstGeom>
-        </p:spPr>
-      </p:pic>
+              <a:rPr sz="1100">
+                <a:solidFill>
+                  <a:srgbClr val="8B6B22"/>
+                </a:solidFill>
+                <a:latin typeface="DM Sans"/>
+              </a:rPr>
+              <a:t>[REPLACE: S03-visitor-badge.png]</a:t>
+            </a:r>
+          </a:p>
+        </p:txBody>
+      </p:sp>
       <p:sp>
         <p:nvSpPr>
           <p:cNvPr id="4" name="TextBox 3"/>
@@ -6743,8 +5453,8 @@
         </p:nvSpPr>
         <p:spPr>
           <a:xfrm>
-            <a:off x="1500000" y="4100000"/>
-            <a:ext cx="9100000" cy="1200000"/>
+            <a:off x="7100000" y="1500000"/>
+            <a:ext cx="4200000" cy="1100000"/>
           </a:xfrm>
           <a:prstGeom prst="rect">
             <a:avLst/>
@@ -6757,15 +5467,15 @@
           </a:bodyPr>
           <a:lstStyle/>
           <a:p>
-            <a:pPr algn="ctr"/>
-            <a:r>
-              <a:rPr sz="2200" b="0">
+            <a:pPr algn="l"/>
+            <a:r>
+              <a:rPr sz="1600" b="0">
                 <a:solidFill>
                   <a:srgbClr val="1A1714"/>
                 </a:solidFill>
                 <a:latin typeface="DM Sans"/>
               </a:rPr>
-              <a:t>Host knows before the visitor reaches the waiting area.</a:t>
+              <a:t>①  QR-coded, time-stamped, host-named.</a:t>
             </a:r>
           </a:p>
         </p:txBody>
@@ -6778,8 +5488,8 @@
         </p:nvSpPr>
         <p:spPr>
           <a:xfrm>
-            <a:off x="8000000" y="6500000"/>
-            <a:ext cx="4000000" cy="300000"/>
+            <a:off x="7100000" y="2800000"/>
+            <a:ext cx="4200000" cy="1100000"/>
           </a:xfrm>
           <a:prstGeom prst="rect">
             <a:avLst/>
@@ -6792,6 +5502,111 @@
           </a:bodyPr>
           <a:lstStyle/>
           <a:p>
+            <a:pPr algn="l"/>
+            <a:r>
+              <a:rPr sz="1600" b="0">
+                <a:solidFill>
+                  <a:srgbClr val="1A1714"/>
+                </a:solidFill>
+                <a:latin typeface="DM Sans"/>
+              </a:rPr>
+              <a:t>②  Printable from any device.</a:t>
+            </a:r>
+          </a:p>
+        </p:txBody>
+      </p:sp>
+      <p:sp>
+        <p:nvSpPr>
+          <p:cNvPr id="6" name="TextBox 5"/>
+          <p:cNvSpPr txBox="1"/>
+          <p:nvPr/>
+        </p:nvSpPr>
+        <p:spPr>
+          <a:xfrm>
+            <a:off x="7100000" y="4100000"/>
+            <a:ext cx="4200000" cy="1100000"/>
+          </a:xfrm>
+          <a:prstGeom prst="rect">
+            <a:avLst/>
+          </a:prstGeom>
+          <a:noFill/>
+        </p:spPr>
+        <p:txBody>
+          <a:bodyPr wrap="square">
+            <a:spAutoFit/>
+          </a:bodyPr>
+          <a:lstStyle/>
+          <a:p>
+            <a:pPr algn="l"/>
+            <a:r>
+              <a:rPr sz="1600" b="0">
+                <a:solidFill>
+                  <a:srgbClr val="1A1714"/>
+                </a:solidFill>
+                <a:latin typeface="DM Sans"/>
+              </a:rPr>
+              <a:t>③  Re-issuable if lost.</a:t>
+            </a:r>
+          </a:p>
+        </p:txBody>
+      </p:sp>
+      <p:sp>
+        <p:nvSpPr>
+          <p:cNvPr id="7" name="TextBox 6"/>
+          <p:cNvSpPr txBox="1"/>
+          <p:nvPr/>
+        </p:nvSpPr>
+        <p:spPr>
+          <a:xfrm>
+            <a:off x="800000" y="6100000"/>
+            <a:ext cx="10500000" cy="300000"/>
+          </a:xfrm>
+          <a:prstGeom prst="rect">
+            <a:avLst/>
+          </a:prstGeom>
+          <a:noFill/>
+        </p:spPr>
+        <p:txBody>
+          <a:bodyPr wrap="square">
+            <a:spAutoFit/>
+          </a:bodyPr>
+          <a:lstStyle/>
+          <a:p>
+            <a:pPr algn="l"/>
+            <a:r>
+              <a:rPr sz="1100" b="0">
+                <a:solidFill>
+                  <a:srgbClr val="8B6B22"/>
+                </a:solidFill>
+                <a:latin typeface="DM Sans"/>
+              </a:rPr>
+              <a:t>Badge view, post-submit.</a:t>
+            </a:r>
+          </a:p>
+        </p:txBody>
+      </p:sp>
+      <p:sp>
+        <p:nvSpPr>
+          <p:cNvPr id="8" name="TextBox 7"/>
+          <p:cNvSpPr txBox="1"/>
+          <p:nvPr/>
+        </p:nvSpPr>
+        <p:spPr>
+          <a:xfrm>
+            <a:off x="8000000" y="6500000"/>
+            <a:ext cx="4000000" cy="300000"/>
+          </a:xfrm>
+          <a:prstGeom prst="rect">
+            <a:avLst/>
+          </a:prstGeom>
+          <a:noFill/>
+        </p:spPr>
+        <p:txBody>
+          <a:bodyPr wrap="square">
+            <a:spAutoFit/>
+          </a:bodyPr>
+          <a:lstStyle/>
+          <a:p>
             <a:pPr algn="r"/>
             <a:r>
               <a:rPr sz="1100" b="0">
@@ -6800,7 +5615,7 @@
                 </a:solidFill>
                 <a:latin typeface="DM Sans"/>
               </a:rPr>
-              <a:t>02 · SmartGate — Visitor Management · 07/20</a:t>
+              <a:t>02 · SmartGate — Visitor Management · 07/15</a:t>
             </a:r>
           </a:p>
         </p:txBody>
@@ -6861,7 +5676,7 @@
                 </a:solidFill>
                 <a:latin typeface="DM Sans"/>
               </a:rPr>
-              <a:t>The visitor badge</a:t>
+              <a:t>Telegram alert, the host's phone</a:t>
             </a:r>
           </a:p>
         </p:txBody>
@@ -6915,7 +5730,7 @@
                 </a:solidFill>
                 <a:latin typeface="DM Sans"/>
               </a:rPr>
-              <a:t>[REPLACE: S03-visitor-badge.png]</a:t>
+              <a:t>[REPLACE: S05-telegram-arrival.png]</a:t>
             </a:r>
           </a:p>
         </p:txBody>
@@ -6950,7 +5765,7 @@
                 </a:solidFill>
                 <a:latin typeface="DM Sans"/>
               </a:rPr>
-              <a:t>①  QR-coded, time-stamped, host-named.</a:t>
+              <a:t>①  Visitor name, purpose, badge code.</a:t>
             </a:r>
           </a:p>
         </p:txBody>
@@ -6985,7 +5800,7 @@
                 </a:solidFill>
                 <a:latin typeface="DM Sans"/>
               </a:rPr>
-              <a:t>②  Printable from any device.</a:t>
+              <a:t>②  Tap to acknowledge.</a:t>
             </a:r>
           </a:p>
         </p:txBody>
@@ -7020,7 +5835,7 @@
                 </a:solidFill>
                 <a:latin typeface="DM Sans"/>
               </a:rPr>
-              <a:t>③  Re-issuable if lost.</a:t>
+              <a:t>③  Directorate director cc'd automatically.</a:t>
             </a:r>
           </a:p>
         </p:txBody>
@@ -7055,7 +5870,7 @@
                 </a:solidFill>
                 <a:latin typeface="DM Sans"/>
               </a:rPr>
-              <a:t>Badge view, post-submit.</a:t>
+              <a:t>One of three independent channels — in-app, Telegram, Web Push.</a:t>
             </a:r>
           </a:p>
         </p:txBody>
@@ -7090,7 +5905,7 @@
                 </a:solidFill>
                 <a:latin typeface="DM Sans"/>
               </a:rPr>
-              <a:t>02 · SmartGate — Visitor Management · 08/20</a:t>
+              <a:t>02 · SmartGate — Visitor Management · 08/15</a:t>
             </a:r>
           </a:p>
         </p:txBody>
@@ -7109,7 +5924,7 @@
     <p:bg>
       <p:bgPr>
         <a:solidFill>
-          <a:srgbClr val="F6F1E7"/>
+          <a:srgbClr val="0E1411"/>
         </a:solidFill>
         <a:effectLst/>
       </p:bgPr>
@@ -7121,16 +5936,40 @@
         <p:nvPr/>
       </p:nvGrpSpPr>
       <p:grpSpPr/>
-      <p:sp>
-        <p:nvSpPr>
-          <p:cNvPr id="2" name="TextBox 1"/>
+      <p:pic>
+        <p:nvPicPr>
+          <p:cNvPr id="2" name="Picture 1" descr="kente-texture-overlay.png"/>
+          <p:cNvPicPr>
+            <a:picLocks noChangeAspect="1"/>
+          </p:cNvPicPr>
+          <p:nvPr/>
+        </p:nvPicPr>
+        <p:blipFill>
+          <a:blip r:embed="rId2"/>
+          <a:stretch>
+            <a:fillRect/>
+          </a:stretch>
+        </p:blipFill>
+        <p:spPr>
+          <a:xfrm>
+            <a:off x="0" y="0"/>
+            <a:ext cx="12192000" cy="6858000"/>
+          </a:xfrm>
+          <a:prstGeom prst="rect">
+            <a:avLst/>
+          </a:prstGeom>
+        </p:spPr>
+      </p:pic>
+      <p:sp>
+        <p:nvSpPr>
+          <p:cNvPr id="3" name="TextBox 2"/>
           <p:cNvSpPr txBox="1"/>
           <p:nvPr/>
         </p:nvSpPr>
         <p:spPr>
           <a:xfrm>
-            <a:off x="800000" y="500000"/>
-            <a:ext cx="10500000" cy="700000"/>
+            <a:off x="800000" y="1500000"/>
+            <a:ext cx="10500000" cy="3500000"/>
           </a:xfrm>
           <a:prstGeom prst="rect">
             <a:avLst/>
@@ -7143,69 +5982,15 @@
           </a:bodyPr>
           <a:lstStyle/>
           <a:p>
-            <a:pPr algn="l"/>
-            <a:r>
-              <a:rPr sz="3200" b="1">
-                <a:solidFill>
-                  <a:srgbClr val="0E1411"/>
-                </a:solidFill>
-                <a:latin typeface="DM Sans"/>
-              </a:rPr>
-              <a:t>Three-channel arrival alert</a:t>
-            </a:r>
-          </a:p>
-        </p:txBody>
-      </p:sp>
-      <p:sp>
-        <p:nvSpPr>
-          <p:cNvPr id="3" name="Rectangle 2"/>
-          <p:cNvSpPr/>
-          <p:nvPr/>
-        </p:nvSpPr>
-        <p:spPr>
-          <a:xfrm>
-            <a:off x="800000" y="1500000"/>
-            <a:ext cx="5800000" cy="4500000"/>
-          </a:xfrm>
-          <a:prstGeom prst="rect">
-            <a:avLst/>
-          </a:prstGeom>
-          <a:solidFill>
-            <a:srgbClr val="FBF7EF"/>
-          </a:solidFill>
-          <a:ln>
-            <a:solidFill>
-              <a:srgbClr val="D8CFBE"/>
-            </a:solidFill>
-          </a:ln>
-        </p:spPr>
-        <p:style>
-          <a:lnRef idx="1">
-            <a:schemeClr val="accent1"/>
-          </a:lnRef>
-          <a:fillRef idx="3">
-            <a:schemeClr val="accent1"/>
-          </a:fillRef>
-          <a:effectRef idx="2">
-            <a:schemeClr val="accent1"/>
-          </a:effectRef>
-          <a:fontRef idx="minor">
-            <a:schemeClr val="lt1"/>
-          </a:fontRef>
-        </p:style>
-        <p:txBody>
-          <a:bodyPr rtlCol="0" anchor="ctr"/>
-          <a:lstStyle/>
-          <a:p>
             <a:pPr algn="ctr"/>
             <a:r>
-              <a:rPr sz="1100">
-                <a:solidFill>
-                  <a:srgbClr val="8B6B22"/>
-                </a:solidFill>
-                <a:latin typeface="DM Sans"/>
-              </a:rPr>
-              <a:t>[REPLACE: S04-in-app-bell.png]</a:t>
+              <a:rPr sz="22000" b="1">
+                <a:solidFill>
+                  <a:srgbClr val="C9A14A"/>
+                </a:solidFill>
+                <a:latin typeface="Playfair Display"/>
+              </a:rPr>
+              <a:t>&lt;N02&gt;</a:t>
             </a:r>
           </a:p>
         </p:txBody>
@@ -7218,8 +6003,8 @@
         </p:nvSpPr>
         <p:spPr>
           <a:xfrm>
-            <a:off x="7100000" y="1500000"/>
-            <a:ext cx="4200000" cy="1100000"/>
+            <a:off x="800000" y="5300000"/>
+            <a:ext cx="10500000" cy="700000"/>
           </a:xfrm>
           <a:prstGeom prst="rect">
             <a:avLst/>
@@ -7232,15 +6017,15 @@
           </a:bodyPr>
           <a:lstStyle/>
           <a:p>
-            <a:pPr algn="l"/>
-            <a:r>
-              <a:rPr sz="1600" b="0">
-                <a:solidFill>
-                  <a:srgbClr val="1A1714"/>
+            <a:pPr algn="ctr"/>
+            <a:r>
+              <a:rPr sz="2800" b="0">
+                <a:solidFill>
+                  <a:srgbClr val="F6F1E7"/>
                 </a:solidFill>
                 <a:latin typeface="DM Sans"/>
               </a:rPr>
-              <a:t>①  In-app bell — for hosts at their desk.</a:t>
+              <a:t>Visitors checked in on an average day. Each one accounted for.</a:t>
             </a:r>
           </a:p>
         </p:txBody>
@@ -7253,8 +6038,8 @@
         </p:nvSpPr>
         <p:spPr>
           <a:xfrm>
-            <a:off x="7100000" y="2800000"/>
-            <a:ext cx="4200000" cy="1100000"/>
+            <a:off x="8000000" y="6500000"/>
+            <a:ext cx="4000000" cy="300000"/>
           </a:xfrm>
           <a:prstGeom prst="rect">
             <a:avLst/>
@@ -7267,120 +6052,15 @@
           </a:bodyPr>
           <a:lstStyle/>
           <a:p>
-            <a:pPr algn="l"/>
-            <a:r>
-              <a:rPr sz="1600" b="0">
-                <a:solidFill>
-                  <a:srgbClr val="1A1714"/>
+            <a:pPr algn="r"/>
+            <a:r>
+              <a:rPr sz="1100" b="0">
+                <a:solidFill>
+                  <a:srgbClr val="D8CFBE"/>
                 </a:solidFill>
                 <a:latin typeface="DM Sans"/>
               </a:rPr>
-              <a:t>②  Telegram — for hosts on the move.</a:t>
-            </a:r>
-          </a:p>
-        </p:txBody>
-      </p:sp>
-      <p:sp>
-        <p:nvSpPr>
-          <p:cNvPr id="6" name="TextBox 5"/>
-          <p:cNvSpPr txBox="1"/>
-          <p:nvPr/>
-        </p:nvSpPr>
-        <p:spPr>
-          <a:xfrm>
-            <a:off x="7100000" y="4100000"/>
-            <a:ext cx="4200000" cy="1100000"/>
-          </a:xfrm>
-          <a:prstGeom prst="rect">
-            <a:avLst/>
-          </a:prstGeom>
-          <a:noFill/>
-        </p:spPr>
-        <p:txBody>
-          <a:bodyPr wrap="square">
-            <a:spAutoFit/>
-          </a:bodyPr>
-          <a:lstStyle/>
-          <a:p>
-            <a:pPr algn="l"/>
-            <a:r>
-              <a:rPr sz="1600" b="0">
-                <a:solidFill>
-                  <a:srgbClr val="1A1714"/>
-                </a:solidFill>
-                <a:latin typeface="DM Sans"/>
-              </a:rPr>
-              <a:t>③  Web Push — for hosts on mobile, app closed.</a:t>
-            </a:r>
-          </a:p>
-        </p:txBody>
-      </p:sp>
-      <p:sp>
-        <p:nvSpPr>
-          <p:cNvPr id="7" name="TextBox 6"/>
-          <p:cNvSpPr txBox="1"/>
-          <p:nvPr/>
-        </p:nvSpPr>
-        <p:spPr>
-          <a:xfrm>
-            <a:off x="800000" y="6100000"/>
-            <a:ext cx="10500000" cy="300000"/>
-          </a:xfrm>
-          <a:prstGeom prst="rect">
-            <a:avLst/>
-          </a:prstGeom>
-          <a:noFill/>
-        </p:spPr>
-        <p:txBody>
-          <a:bodyPr wrap="square">
-            <a:spAutoFit/>
-          </a:bodyPr>
-          <a:lstStyle/>
-          <a:p>
-            <a:pPr algn="l"/>
-            <a:r>
-              <a:rPr sz="1100" b="0">
-                <a:solidFill>
-                  <a:srgbClr val="8B6B22"/>
-                </a:solidFill>
-                <a:latin typeface="DM Sans"/>
-              </a:rPr>
-              <a:t>Three independent channels, one event.</a:t>
-            </a:r>
-          </a:p>
-        </p:txBody>
-      </p:sp>
-      <p:sp>
-        <p:nvSpPr>
-          <p:cNvPr id="8" name="TextBox 7"/>
-          <p:cNvSpPr txBox="1"/>
-          <p:nvPr/>
-        </p:nvSpPr>
-        <p:spPr>
-          <a:xfrm>
-            <a:off x="8000000" y="6500000"/>
-            <a:ext cx="4000000" cy="300000"/>
-          </a:xfrm>
-          <a:prstGeom prst="rect">
-            <a:avLst/>
-          </a:prstGeom>
-          <a:noFill/>
-        </p:spPr>
-        <p:txBody>
-          <a:bodyPr wrap="square">
-            <a:spAutoFit/>
-          </a:bodyPr>
-          <a:lstStyle/>
-          <a:p>
-            <a:pPr algn="r"/>
-            <a:r>
-              <a:rPr sz="1100" b="0">
-                <a:solidFill>
-                  <a:srgbClr val="D8CFBE"/>
-                </a:solidFill>
-                <a:latin typeface="DM Sans"/>
-              </a:rPr>
-              <a:t>02 · SmartGate — Visitor Management · 09/20</a:t>
+              <a:t>02 · SmartGate — Visitor Management · 09/15</a:t>
             </a:r>
           </a:p>
         </p:txBody>
